--- a/Presentacion_Gestor_Horarios.pptx
+++ b/Presentacion_Gestor_Horarios.pptx
@@ -16,6 +16,7 @@
     <p:sldId id="264" r:id="rId15"/>
     <p:sldId id="265" r:id="rId16"/>
     <p:sldId id="266" r:id="rId17"/>
+    <p:sldId id="267" r:id="rId18"/>
   </p:sldIdLst>
   <p:sldSz cx="12191695" cy="6858000" type="screen4x3"/>
   <p:notesSz cx="6858000" cy="9144000"/>
@@ -3284,7 +3285,7 @@
               </a:defRPr>
             </a:pPr>
             <a:r>
-              <a:t>Septiembre 2026  •  v1.0</a:t>
+              <a:t>Septiembre 2026  •  v1.1</a:t>
             </a:r>
           </a:p>
         </p:txBody>
@@ -3388,7 +3389,7 @@
               </a:defRPr>
             </a:pPr>
             <a:r>
-              <a:t>Datos Actuales</a:t>
+              <a:t>Edición de Datos</a:t>
             </a:r>
           </a:p>
         </p:txBody>
@@ -3445,11 +3446,11 @@
         <p:spPr>
           <a:xfrm>
             <a:off x="731520" y="1645920"/>
-            <a:ext cx="2560320" cy="2011680"/>
+            <a:ext cx="5029200" cy="2286000"/>
           </a:xfrm>
           <a:prstGeom prst="roundRect">
             <a:avLst>
-              <a:gd name="adj" fmla="val 5000"/>
+              <a:gd name="adj" fmla="val 4000"/>
             </a:avLst>
           </a:prstGeom>
           <a:solidFill>
@@ -3489,29 +3490,29 @@
         </p:nvSpPr>
         <p:spPr>
           <a:xfrm>
-            <a:off x="731520" y="1828800"/>
-            <a:ext cx="2560320" cy="731520"/>
-          </a:xfrm>
-          <a:prstGeom prst="rect">
-            <a:avLst/>
-          </a:prstGeom>
-          <a:noFill/>
-        </p:spPr>
-        <p:txBody>
-          <a:bodyPr wrap="square">
-            <a:spAutoFit/>
-          </a:bodyPr>
-          <a:lstStyle/>
-          <a:p>
-            <a:pPr algn="ctr">
-              <a:defRPr sz="4800" b="1">
+            <a:off x="914400" y="1737360"/>
+            <a:ext cx="4663440" cy="365760"/>
+          </a:xfrm>
+          <a:prstGeom prst="rect">
+            <a:avLst/>
+          </a:prstGeom>
+          <a:noFill/>
+        </p:spPr>
+        <p:txBody>
+          <a:bodyPr wrap="square">
+            <a:spAutoFit/>
+          </a:bodyPr>
+          <a:lstStyle/>
+          <a:p>
+            <a:pPr algn="l">
+              <a:defRPr sz="1600" b="1">
                 <a:solidFill>
                   <a:srgbClr val="3B82F6"/>
                 </a:solidFill>
               </a:defRPr>
             </a:pPr>
             <a:r>
-              <a:t>9</a:t>
+              <a:t>personas.json</a:t>
             </a:r>
           </a:p>
         </p:txBody>
@@ -3524,82 +3525,110 @@
         </p:nvSpPr>
         <p:spPr>
           <a:xfrm>
-            <a:off x="731520" y="2560320"/>
-            <a:ext cx="2560320" cy="365760"/>
-          </a:xfrm>
-          <a:prstGeom prst="rect">
-            <a:avLst/>
-          </a:prstGeom>
-          <a:noFill/>
-        </p:spPr>
-        <p:txBody>
-          <a:bodyPr wrap="square">
-            <a:spAutoFit/>
-          </a:bodyPr>
-          <a:lstStyle/>
-          <a:p>
-            <a:pPr algn="ctr">
-              <a:defRPr sz="1800" b="1">
-                <a:solidFill>
-                  <a:srgbClr val="FFFFFF"/>
-                </a:solidFill>
-              </a:defRPr>
-            </a:pPr>
-            <a:r>
-              <a:t>Tiendas</a:t>
-            </a:r>
-          </a:p>
-        </p:txBody>
-      </p:sp>
-      <p:sp>
-        <p:nvSpPr>
-          <p:cNvPr id="8" name="TextBox 7"/>
-          <p:cNvSpPr txBox="1"/>
-          <p:nvPr/>
-        </p:nvSpPr>
-        <p:spPr>
-          <a:xfrm>
-            <a:off x="731520" y="2926080"/>
-            <a:ext cx="2560320" cy="365760"/>
-          </a:xfrm>
-          <a:prstGeom prst="rect">
-            <a:avLst/>
-          </a:prstGeom>
-          <a:noFill/>
-        </p:spPr>
-        <p:txBody>
-          <a:bodyPr wrap="square">
-            <a:spAutoFit/>
-          </a:bodyPr>
-          <a:lstStyle/>
-          <a:p>
-            <a:pPr algn="ctr">
-              <a:defRPr sz="1300" b="0">
-                <a:solidFill>
-                  <a:srgbClr val="9CA3AF"/>
-                </a:solidFill>
-              </a:defRPr>
-            </a:pPr>
-            <a:r>
-              <a:t>Todas en Colombia</a:t>
-            </a:r>
-          </a:p>
-        </p:txBody>
-      </p:sp>
-      <p:sp>
-        <p:nvSpPr>
-          <p:cNvPr id="9" name="Rounded Rectangle 8"/>
+            <a:off x="914400" y="2148840"/>
+            <a:ext cx="4663440" cy="1645920"/>
+          </a:xfrm>
+          <a:prstGeom prst="rect">
+            <a:avLst/>
+          </a:prstGeom>
+          <a:noFill/>
+        </p:spPr>
+        <p:txBody>
+          <a:bodyPr wrap="square">
+            <a:spAutoFit/>
+          </a:bodyPr>
+          <a:lstStyle/>
+          <a:p>
+            <a:pPr>
+              <a:spcAft>
+                <a:spcPts val="800"/>
+              </a:spcAft>
+              <a:defRPr sz="1300">
+                <a:solidFill>
+                  <a:srgbClr val="E5E7EB"/>
+                </a:solidFill>
+              </a:defRPr>
+            </a:pPr>
+            <a:r>
+              <a:t>• id: identificador único</a:t>
+            </a:r>
+          </a:p>
+          <a:p>
+            <a:pPr>
+              <a:spcAft>
+                <a:spcPts val="800"/>
+              </a:spcAft>
+              <a:defRPr sz="1300">
+                <a:solidFill>
+                  <a:srgbClr val="E5E7EB"/>
+                </a:solidFill>
+              </a:defRPr>
+            </a:pPr>
+            <a:r>
+              <a:t>• name: nombre completo</a:t>
+            </a:r>
+          </a:p>
+          <a:p>
+            <a:pPr>
+              <a:spcAft>
+                <a:spcPts val="800"/>
+              </a:spcAft>
+              <a:defRPr sz="1300">
+                <a:solidFill>
+                  <a:srgbClr val="E5E7EB"/>
+                </a:solidFill>
+              </a:defRPr>
+            </a:pPr>
+            <a:r>
+              <a:t>• email: correo electrónico</a:t>
+            </a:r>
+          </a:p>
+          <a:p>
+            <a:pPr>
+              <a:spcAft>
+                <a:spcPts val="800"/>
+              </a:spcAft>
+              <a:defRPr sz="1300">
+                <a:solidFill>
+                  <a:srgbClr val="E5E7EB"/>
+                </a:solidFill>
+              </a:defRPr>
+            </a:pPr>
+            <a:r>
+              <a:t>• phone: teléfono</a:t>
+            </a:r>
+          </a:p>
+          <a:p>
+            <a:pPr>
+              <a:spcAft>
+                <a:spcPts val="800"/>
+              </a:spcAft>
+              <a:defRPr sz="1300">
+                <a:solidFill>
+                  <a:srgbClr val="E5E7EB"/>
+                </a:solidFill>
+              </a:defRPr>
+            </a:pPr>
+            <a:r>
+              <a:t>• photo: ruta de la foto (opcional)</a:t>
+            </a:r>
+          </a:p>
+        </p:txBody>
+      </p:sp>
+      <p:sp>
+        <p:nvSpPr>
+          <p:cNvPr id="8" name="Rounded Rectangle 7"/>
           <p:cNvSpPr/>
           <p:nvPr/>
         </p:nvSpPr>
         <p:spPr>
           <a:xfrm>
-            <a:off x="3566160" y="1645920"/>
-            <a:ext cx="2560320" cy="2011680"/>
+            <a:off x="6400800" y="1645920"/>
+            <a:ext cx="5029200" cy="2286000"/>
           </a:xfrm>
           <a:prstGeom prst="roundRect">
             <a:avLst>
-              <a:gd name="adj" fmla="val 5000"/>
+              <a:gd name="adj" fmla="val 4000"/>
             </a:avLst>
           </a:prstGeom>
           <a:solidFill>
@@ -3633,127 +3662,170 @@
       </p:sp>
       <p:sp>
         <p:nvSpPr>
+          <p:cNvPr id="9" name="TextBox 8"/>
+          <p:cNvSpPr txBox="1"/>
+          <p:nvPr/>
+        </p:nvSpPr>
+        <p:spPr>
+          <a:xfrm>
+            <a:off x="6583680" y="1737360"/>
+            <a:ext cx="4663440" cy="365760"/>
+          </a:xfrm>
+          <a:prstGeom prst="rect">
+            <a:avLst/>
+          </a:prstGeom>
+          <a:noFill/>
+        </p:spPr>
+        <p:txBody>
+          <a:bodyPr wrap="square">
+            <a:spAutoFit/>
+          </a:bodyPr>
+          <a:lstStyle/>
+          <a:p>
+            <a:pPr algn="l">
+              <a:defRPr sz="1600" b="1">
+                <a:solidFill>
+                  <a:srgbClr val="F59E0B"/>
+                </a:solidFill>
+              </a:defRPr>
+            </a:pPr>
+            <a:r>
+              <a:t>horarios.json</a:t>
+            </a:r>
+          </a:p>
+        </p:txBody>
+      </p:sp>
+      <p:sp>
+        <p:nvSpPr>
           <p:cNvPr id="10" name="TextBox 9"/>
           <p:cNvSpPr txBox="1"/>
           <p:nvPr/>
         </p:nvSpPr>
         <p:spPr>
           <a:xfrm>
-            <a:off x="3566160" y="1828800"/>
-            <a:ext cx="2560320" cy="731520"/>
-          </a:xfrm>
-          <a:prstGeom prst="rect">
-            <a:avLst/>
-          </a:prstGeom>
-          <a:noFill/>
-        </p:spPr>
-        <p:txBody>
-          <a:bodyPr wrap="square">
-            <a:spAutoFit/>
-          </a:bodyPr>
-          <a:lstStyle/>
-          <a:p>
-            <a:pPr algn="ctr">
-              <a:defRPr sz="4800" b="1">
-                <a:solidFill>
-                  <a:srgbClr val="10B981"/>
-                </a:solidFill>
-              </a:defRPr>
-            </a:pPr>
-            <a:r>
-              <a:t>7</a:t>
-            </a:r>
-          </a:p>
-        </p:txBody>
-      </p:sp>
-      <p:sp>
-        <p:nvSpPr>
-          <p:cNvPr id="11" name="TextBox 10"/>
-          <p:cNvSpPr txBox="1"/>
-          <p:nvPr/>
-        </p:nvSpPr>
-        <p:spPr>
-          <a:xfrm>
-            <a:off x="3566160" y="2560320"/>
-            <a:ext cx="2560320" cy="365760"/>
-          </a:xfrm>
-          <a:prstGeom prst="rect">
-            <a:avLst/>
-          </a:prstGeom>
-          <a:noFill/>
-        </p:spPr>
-        <p:txBody>
-          <a:bodyPr wrap="square">
-            <a:spAutoFit/>
-          </a:bodyPr>
-          <a:lstStyle/>
-          <a:p>
-            <a:pPr algn="ctr">
-              <a:defRPr sz="1800" b="1">
-                <a:solidFill>
-                  <a:srgbClr val="FFFFFF"/>
-                </a:solidFill>
-              </a:defRPr>
-            </a:pPr>
-            <a:r>
-              <a:t>Empleados</a:t>
-            </a:r>
-          </a:p>
-        </p:txBody>
-      </p:sp>
-      <p:sp>
-        <p:nvSpPr>
-          <p:cNvPr id="12" name="TextBox 11"/>
-          <p:cNvSpPr txBox="1"/>
-          <p:nvPr/>
-        </p:nvSpPr>
-        <p:spPr>
-          <a:xfrm>
-            <a:off x="3566160" y="2926080"/>
-            <a:ext cx="2560320" cy="365760"/>
-          </a:xfrm>
-          <a:prstGeom prst="rect">
-            <a:avLst/>
-          </a:prstGeom>
-          <a:noFill/>
-        </p:spPr>
-        <p:txBody>
-          <a:bodyPr wrap="square">
-            <a:spAutoFit/>
-          </a:bodyPr>
-          <a:lstStyle/>
-          <a:p>
-            <a:pPr algn="ctr">
-              <a:defRPr sz="1300" b="0">
-                <a:solidFill>
-                  <a:srgbClr val="9CA3AF"/>
-                </a:solidFill>
-              </a:defRPr>
-            </a:pPr>
-            <a:r>
-              <a:t>Técnicos únicos</a:t>
-            </a:r>
-          </a:p>
-        </p:txBody>
-      </p:sp>
-      <p:sp>
-        <p:nvSpPr>
-          <p:cNvPr id="13" name="Rounded Rectangle 12"/>
+            <a:off x="6583680" y="2148840"/>
+            <a:ext cx="4663440" cy="1645920"/>
+          </a:xfrm>
+          <a:prstGeom prst="rect">
+            <a:avLst/>
+          </a:prstGeom>
+          <a:noFill/>
+        </p:spPr>
+        <p:txBody>
+          <a:bodyPr wrap="square">
+            <a:spAutoFit/>
+          </a:bodyPr>
+          <a:lstStyle/>
+          <a:p>
+            <a:pPr>
+              <a:spcAft>
+                <a:spcPts val="800"/>
+              </a:spcAft>
+              <a:defRPr sz="1300">
+                <a:solidFill>
+                  <a:srgbClr val="E5E7EB"/>
+                </a:solidFill>
+              </a:defRPr>
+            </a:pPr>
+            <a:r>
+              <a:t>• personaId: referencia a personas.json</a:t>
+            </a:r>
+          </a:p>
+          <a:p>
+            <a:pPr>
+              <a:spcAft>
+                <a:spcPts val="800"/>
+              </a:spcAft>
+              <a:defRPr sz="1300">
+                <a:solidFill>
+                  <a:srgbClr val="E5E7EB"/>
+                </a:solidFill>
+              </a:defRPr>
+            </a:pPr>
+            <a:r>
+              <a:t>• month: mes en español</a:t>
+            </a:r>
+          </a:p>
+          <a:p>
+            <a:pPr>
+              <a:spcAft>
+                <a:spcPts val="800"/>
+              </a:spcAft>
+              <a:defRPr sz="1300">
+                <a:solidFill>
+                  <a:srgbClr val="E5E7EB"/>
+                </a:solidFill>
+              </a:defRPr>
+            </a:pPr>
+            <a:r>
+              <a:t>• week: Semana 1 a Semana 5</a:t>
+            </a:r>
+          </a:p>
+          <a:p>
+            <a:pPr>
+              <a:spcAft>
+                <a:spcPts val="800"/>
+              </a:spcAft>
+              <a:defRPr sz="1300">
+                <a:solidFill>
+                  <a:srgbClr val="E5E7EB"/>
+                </a:solidFill>
+              </a:defRPr>
+            </a:pPr>
+            <a:r>
+              <a:t>• day: día de la semana</a:t>
+            </a:r>
+          </a:p>
+          <a:p>
+            <a:pPr>
+              <a:spcAft>
+                <a:spcPts val="800"/>
+              </a:spcAft>
+              <a:defRPr sz="1300">
+                <a:solidFill>
+                  <a:srgbClr val="E5E7EB"/>
+                </a:solidFill>
+              </a:defRPr>
+            </a:pPr>
+            <a:r>
+              <a:t>• start/end: horario (type normal)</a:t>
+            </a:r>
+          </a:p>
+          <a:p>
+            <a:pPr>
+              <a:spcAft>
+                <a:spcPts val="800"/>
+              </a:spcAft>
+              <a:defRPr sz="1300">
+                <a:solidFill>
+                  <a:srgbClr val="E5E7EB"/>
+                </a:solidFill>
+              </a:defRPr>
+            </a:pPr>
+            <a:r>
+              <a:t>• type: "normal" o "guardia"</a:t>
+            </a:r>
+          </a:p>
+        </p:txBody>
+      </p:sp>
+      <p:sp>
+        <p:nvSpPr>
+          <p:cNvPr id="11" name="Rounded Rectangle 10"/>
           <p:cNvSpPr/>
           <p:nvPr/>
         </p:nvSpPr>
         <p:spPr>
           <a:xfrm>
-            <a:off x="6400800" y="1645920"/>
-            <a:ext cx="2560320" cy="2011680"/>
+            <a:off x="731520" y="4206240"/>
+            <a:ext cx="10698480" cy="640080"/>
           </a:xfrm>
           <a:prstGeom prst="roundRect">
             <a:avLst>
-              <a:gd name="adj" fmla="val 5000"/>
+              <a:gd name="adj" fmla="val 3000"/>
             </a:avLst>
           </a:prstGeom>
           <a:solidFill>
-            <a:srgbClr val="1A233B"/>
+            <a:srgbClr val="232D4A"/>
           </a:solidFill>
           <a:ln>
             <a:noFill/>
@@ -3783,84 +3855,14 @@
       </p:sp>
       <p:sp>
         <p:nvSpPr>
-          <p:cNvPr id="14" name="TextBox 13"/>
-          <p:cNvSpPr txBox="1"/>
-          <p:nvPr/>
-        </p:nvSpPr>
-        <p:spPr>
-          <a:xfrm>
-            <a:off x="6400800" y="1828800"/>
-            <a:ext cx="2560320" cy="731520"/>
-          </a:xfrm>
-          <a:prstGeom prst="rect">
-            <a:avLst/>
-          </a:prstGeom>
-          <a:noFill/>
-        </p:spPr>
-        <p:txBody>
-          <a:bodyPr wrap="square">
-            <a:spAutoFit/>
-          </a:bodyPr>
-          <a:lstStyle/>
-          <a:p>
-            <a:pPr algn="ctr">
-              <a:defRPr sz="4800" b="1">
-                <a:solidFill>
-                  <a:srgbClr val="F59E0B"/>
-                </a:solidFill>
-              </a:defRPr>
-            </a:pPr>
-            <a:r>
-              <a:t>194</a:t>
-            </a:r>
-          </a:p>
-        </p:txBody>
-      </p:sp>
-      <p:sp>
-        <p:nvSpPr>
-          <p:cNvPr id="15" name="TextBox 14"/>
-          <p:cNvSpPr txBox="1"/>
-          <p:nvPr/>
-        </p:nvSpPr>
-        <p:spPr>
-          <a:xfrm>
-            <a:off x="6400800" y="2560320"/>
-            <a:ext cx="2560320" cy="365760"/>
-          </a:xfrm>
-          <a:prstGeom prst="rect">
-            <a:avLst/>
-          </a:prstGeom>
-          <a:noFill/>
-        </p:spPr>
-        <p:txBody>
-          <a:bodyPr wrap="square">
-            <a:spAutoFit/>
-          </a:bodyPr>
-          <a:lstStyle/>
-          <a:p>
-            <a:pPr algn="ctr">
-              <a:defRPr sz="1800" b="1">
-                <a:solidFill>
-                  <a:srgbClr val="FFFFFF"/>
-                </a:solidFill>
-              </a:defRPr>
-            </a:pPr>
-            <a:r>
-              <a:t>Registros</a:t>
-            </a:r>
-          </a:p>
-        </p:txBody>
-      </p:sp>
-      <p:sp>
-        <p:nvSpPr>
-          <p:cNvPr id="16" name="TextBox 15"/>
-          <p:cNvSpPr txBox="1"/>
-          <p:nvPr/>
-        </p:nvSpPr>
-        <p:spPr>
-          <a:xfrm>
-            <a:off x="6400800" y="2926080"/>
-            <a:ext cx="2560320" cy="365760"/>
+          <p:cNvPr id="12" name="TextBox 11"/>
+          <p:cNvSpPr txBox="1"/>
+          <p:nvPr/>
+        </p:nvSpPr>
+        <p:spPr>
+          <a:xfrm>
+            <a:off x="914400" y="4251960"/>
+            <a:ext cx="10332720" cy="457200"/>
           </a:xfrm>
           <a:prstGeom prst="rect">
             <a:avLst/>
@@ -3876,767 +3878,12 @@
             <a:pPr algn="ctr">
               <a:defRPr sz="1300" b="0">
                 <a:solidFill>
-                  <a:srgbClr val="9CA3AF"/>
-                </a:solidFill>
-              </a:defRPr>
-            </a:pPr>
-            <a:r>
-              <a:t>Turnos de Septiembre</a:t>
-            </a:r>
-          </a:p>
-        </p:txBody>
-      </p:sp>
-      <p:sp>
-        <p:nvSpPr>
-          <p:cNvPr id="17" name="Rounded Rectangle 16"/>
-          <p:cNvSpPr/>
-          <p:nvPr/>
-        </p:nvSpPr>
-        <p:spPr>
-          <a:xfrm>
-            <a:off x="9235440" y="1645920"/>
-            <a:ext cx="2560320" cy="2011680"/>
-          </a:xfrm>
-          <a:prstGeom prst="roundRect">
-            <a:avLst>
-              <a:gd name="adj" fmla="val 5000"/>
-            </a:avLst>
-          </a:prstGeom>
-          <a:solidFill>
-            <a:srgbClr val="1A233B"/>
-          </a:solidFill>
-          <a:ln>
-            <a:noFill/>
-          </a:ln>
-        </p:spPr>
-        <p:style>
-          <a:lnRef idx="1">
-            <a:schemeClr val="accent1"/>
-          </a:lnRef>
-          <a:fillRef idx="3">
-            <a:schemeClr val="accent1"/>
-          </a:fillRef>
-          <a:effectRef idx="2">
-            <a:schemeClr val="accent1"/>
-          </a:effectRef>
-          <a:fontRef idx="minor">
-            <a:schemeClr val="lt1"/>
-          </a:fontRef>
-        </p:style>
-        <p:txBody>
-          <a:bodyPr rtlCol="0" anchor="ctr"/>
-          <a:lstStyle/>
-          <a:p>
-            <a:pPr algn="ctr"/>
-          </a:p>
-        </p:txBody>
-      </p:sp>
-      <p:sp>
-        <p:nvSpPr>
-          <p:cNvPr id="18" name="TextBox 17"/>
-          <p:cNvSpPr txBox="1"/>
-          <p:nvPr/>
-        </p:nvSpPr>
-        <p:spPr>
-          <a:xfrm>
-            <a:off x="9235440" y="1828800"/>
-            <a:ext cx="2560320" cy="731520"/>
-          </a:xfrm>
-          <a:prstGeom prst="rect">
-            <a:avLst/>
-          </a:prstGeom>
-          <a:noFill/>
-        </p:spPr>
-        <p:txBody>
-          <a:bodyPr wrap="square">
-            <a:spAutoFit/>
-          </a:bodyPr>
-          <a:lstStyle/>
-          <a:p>
-            <a:pPr algn="ctr">
-              <a:defRPr sz="4800" b="1">
-                <a:solidFill>
-                  <a:srgbClr val="3B82F6"/>
-                </a:solidFill>
-              </a:defRPr>
-            </a:pPr>
-            <a:r>
-              <a:t>8</a:t>
-            </a:r>
-          </a:p>
-        </p:txBody>
-      </p:sp>
-      <p:sp>
-        <p:nvSpPr>
-          <p:cNvPr id="19" name="TextBox 18"/>
-          <p:cNvSpPr txBox="1"/>
-          <p:nvPr/>
-        </p:nvSpPr>
-        <p:spPr>
-          <a:xfrm>
-            <a:off x="9235440" y="2560320"/>
-            <a:ext cx="2560320" cy="365760"/>
-          </a:xfrm>
-          <a:prstGeom prst="rect">
-            <a:avLst/>
-          </a:prstGeom>
-          <a:noFill/>
-        </p:spPr>
-        <p:txBody>
-          <a:bodyPr wrap="square">
-            <a:spAutoFit/>
-          </a:bodyPr>
-          <a:lstStyle/>
-          <a:p>
-            <a:pPr algn="ctr">
-              <a:defRPr sz="1800" b="1">
-                <a:solidFill>
-                  <a:srgbClr val="FFFFFF"/>
-                </a:solidFill>
-              </a:defRPr>
-            </a:pPr>
-            <a:r>
-              <a:t>Guardias</a:t>
-            </a:r>
-          </a:p>
-        </p:txBody>
-      </p:sp>
-      <p:sp>
-        <p:nvSpPr>
-          <p:cNvPr id="20" name="TextBox 19"/>
-          <p:cNvSpPr txBox="1"/>
-          <p:nvPr/>
-        </p:nvSpPr>
-        <p:spPr>
-          <a:xfrm>
-            <a:off x="9235440" y="2926080"/>
-            <a:ext cx="2560320" cy="365760"/>
-          </a:xfrm>
-          <a:prstGeom prst="rect">
-            <a:avLst/>
-          </a:prstGeom>
-          <a:noFill/>
-        </p:spPr>
-        <p:txBody>
-          <a:bodyPr wrap="square">
-            <a:spAutoFit/>
-          </a:bodyPr>
-          <a:lstStyle/>
-          <a:p>
-            <a:pPr algn="ctr">
-              <a:defRPr sz="1300" b="0">
-                <a:solidFill>
-                  <a:srgbClr val="9CA3AF"/>
-                </a:solidFill>
-              </a:defRPr>
-            </a:pPr>
-            <a:r>
-              <a:t>4 técnicos en 5 tiendas</a:t>
-            </a:r>
-          </a:p>
-        </p:txBody>
-      </p:sp>
-      <p:sp>
-        <p:nvSpPr>
-          <p:cNvPr id="21" name="Rounded Rectangle 20"/>
-          <p:cNvSpPr/>
-          <p:nvPr/>
-        </p:nvSpPr>
-        <p:spPr>
-          <a:xfrm>
-            <a:off x="731520" y="3931920"/>
-            <a:ext cx="10698480" cy="2011680"/>
-          </a:xfrm>
-          <a:prstGeom prst="roundRect">
-            <a:avLst>
-              <a:gd name="adj" fmla="val 4000"/>
-            </a:avLst>
-          </a:prstGeom>
-          <a:solidFill>
-            <a:srgbClr val="1A233B"/>
-          </a:solidFill>
-          <a:ln>
-            <a:noFill/>
-          </a:ln>
-        </p:spPr>
-        <p:style>
-          <a:lnRef idx="1">
-            <a:schemeClr val="accent1"/>
-          </a:lnRef>
-          <a:fillRef idx="3">
-            <a:schemeClr val="accent1"/>
-          </a:fillRef>
-          <a:effectRef idx="2">
-            <a:schemeClr val="accent1"/>
-          </a:effectRef>
-          <a:fontRef idx="minor">
-            <a:schemeClr val="lt1"/>
-          </a:fontRef>
-        </p:style>
-        <p:txBody>
-          <a:bodyPr rtlCol="0" anchor="ctr"/>
-          <a:lstStyle/>
-          <a:p>
-            <a:pPr algn="ctr"/>
-          </a:p>
-        </p:txBody>
-      </p:sp>
-      <p:sp>
-        <p:nvSpPr>
-          <p:cNvPr id="22" name="TextBox 21"/>
-          <p:cNvSpPr txBox="1"/>
-          <p:nvPr/>
-        </p:nvSpPr>
-        <p:spPr>
-          <a:xfrm>
-            <a:off x="914400" y="4023360"/>
-            <a:ext cx="4572000" cy="365760"/>
-          </a:xfrm>
-          <a:prstGeom prst="rect">
-            <a:avLst/>
-          </a:prstGeom>
-          <a:noFill/>
-        </p:spPr>
-        <p:txBody>
-          <a:bodyPr wrap="square">
-            <a:spAutoFit/>
-          </a:bodyPr>
-          <a:lstStyle/>
-          <a:p>
-            <a:pPr algn="l">
-              <a:defRPr sz="1600" b="1">
-                <a:solidFill>
                   <a:srgbClr val="F59E0B"/>
                 </a:solidFill>
               </a:defRPr>
             </a:pPr>
             <a:r>
-              <a:t>Guardias de Septiembre 2026</a:t>
-            </a:r>
-          </a:p>
-        </p:txBody>
-      </p:sp>
-      <p:sp>
-        <p:nvSpPr>
-          <p:cNvPr id="23" name="TextBox 22"/>
-          <p:cNvSpPr txBox="1"/>
-          <p:nvPr/>
-        </p:nvSpPr>
-        <p:spPr>
-          <a:xfrm>
-            <a:off x="914400" y="4480560"/>
-            <a:ext cx="1828800" cy="274320"/>
-          </a:xfrm>
-          <a:prstGeom prst="rect">
-            <a:avLst/>
-          </a:prstGeom>
-          <a:noFill/>
-        </p:spPr>
-        <p:txBody>
-          <a:bodyPr wrap="square">
-            <a:spAutoFit/>
-          </a:bodyPr>
-          <a:lstStyle/>
-          <a:p>
-            <a:pPr algn="l">
-              <a:defRPr sz="1200" b="1">
-                <a:solidFill>
-                  <a:srgbClr val="FFFFFF"/>
-                </a:solidFill>
-              </a:defRPr>
-            </a:pPr>
-            <a:r>
-              <a:t>🛡️ Kevin Alean</a:t>
-            </a:r>
-          </a:p>
-        </p:txBody>
-      </p:sp>
-      <p:sp>
-        <p:nvSpPr>
-          <p:cNvPr id="24" name="TextBox 23"/>
-          <p:cNvSpPr txBox="1"/>
-          <p:nvPr/>
-        </p:nvSpPr>
-        <p:spPr>
-          <a:xfrm>
-            <a:off x="2743200" y="4480560"/>
-            <a:ext cx="1371600" cy="274320"/>
-          </a:xfrm>
-          <a:prstGeom prst="rect">
-            <a:avLst/>
-          </a:prstGeom>
-          <a:noFill/>
-        </p:spPr>
-        <p:txBody>
-          <a:bodyPr wrap="square">
-            <a:spAutoFit/>
-          </a:bodyPr>
-          <a:lstStyle/>
-          <a:p>
-            <a:pPr algn="l">
-              <a:defRPr sz="1100" b="0">
-                <a:solidFill>
-                  <a:srgbClr val="9CA3AF"/>
-                </a:solidFill>
-              </a:defRPr>
-            </a:pPr>
-            <a:r>
-              <a:t>🏪 C.C Colina</a:t>
-            </a:r>
-          </a:p>
-        </p:txBody>
-      </p:sp>
-      <p:sp>
-        <p:nvSpPr>
-          <p:cNvPr id="25" name="TextBox 24"/>
-          <p:cNvSpPr txBox="1"/>
-          <p:nvPr/>
-        </p:nvSpPr>
-        <p:spPr>
-          <a:xfrm>
-            <a:off x="4114800" y="4480560"/>
-            <a:ext cx="1371600" cy="274320"/>
-          </a:xfrm>
-          <a:prstGeom prst="rect">
-            <a:avLst/>
-          </a:prstGeom>
-          <a:noFill/>
-        </p:spPr>
-        <p:txBody>
-          <a:bodyPr wrap="square">
-            <a:spAutoFit/>
-          </a:bodyPr>
-          <a:lstStyle/>
-          <a:p>
-            <a:pPr algn="l">
-              <a:defRPr sz="1100" b="0">
-                <a:solidFill>
-                  <a:srgbClr val="F59E0B"/>
-                </a:solidFill>
-              </a:defRPr>
-            </a:pPr>
-            <a:r>
-              <a:t>📆 Domingo 20</a:t>
-            </a:r>
-          </a:p>
-        </p:txBody>
-      </p:sp>
-      <p:sp>
-        <p:nvSpPr>
-          <p:cNvPr id="26" name="TextBox 25"/>
-          <p:cNvSpPr txBox="1"/>
-          <p:nvPr/>
-        </p:nvSpPr>
-        <p:spPr>
-          <a:xfrm>
-            <a:off x="4389120" y="4480560"/>
-            <a:ext cx="1828800" cy="274320"/>
-          </a:xfrm>
-          <a:prstGeom prst="rect">
-            <a:avLst/>
-          </a:prstGeom>
-          <a:noFill/>
-        </p:spPr>
-        <p:txBody>
-          <a:bodyPr wrap="square">
-            <a:spAutoFit/>
-          </a:bodyPr>
-          <a:lstStyle/>
-          <a:p>
-            <a:pPr algn="l">
-              <a:defRPr sz="1200" b="1">
-                <a:solidFill>
-                  <a:srgbClr val="FFFFFF"/>
-                </a:solidFill>
-              </a:defRPr>
-            </a:pPr>
-            <a:r>
-              <a:t>🛡️ Angel Ortiz</a:t>
-            </a:r>
-          </a:p>
-        </p:txBody>
-      </p:sp>
-      <p:sp>
-        <p:nvSpPr>
-          <p:cNvPr id="27" name="TextBox 26"/>
-          <p:cNvSpPr txBox="1"/>
-          <p:nvPr/>
-        </p:nvSpPr>
-        <p:spPr>
-          <a:xfrm>
-            <a:off x="6217920" y="4480560"/>
-            <a:ext cx="1371600" cy="274320"/>
-          </a:xfrm>
-          <a:prstGeom prst="rect">
-            <a:avLst/>
-          </a:prstGeom>
-          <a:noFill/>
-        </p:spPr>
-        <p:txBody>
-          <a:bodyPr wrap="square">
-            <a:spAutoFit/>
-          </a:bodyPr>
-          <a:lstStyle/>
-          <a:p>
-            <a:pPr algn="l">
-              <a:defRPr sz="1100" b="0">
-                <a:solidFill>
-                  <a:srgbClr val="9CA3AF"/>
-                </a:solidFill>
-              </a:defRPr>
-            </a:pPr>
-            <a:r>
-              <a:t>🏪 Zona Calle 82</a:t>
-            </a:r>
-          </a:p>
-        </p:txBody>
-      </p:sp>
-      <p:sp>
-        <p:nvSpPr>
-          <p:cNvPr id="28" name="TextBox 27"/>
-          <p:cNvSpPr txBox="1"/>
-          <p:nvPr/>
-        </p:nvSpPr>
-        <p:spPr>
-          <a:xfrm>
-            <a:off x="7589520" y="4480560"/>
-            <a:ext cx="1371600" cy="274320"/>
-          </a:xfrm>
-          <a:prstGeom prst="rect">
-            <a:avLst/>
-          </a:prstGeom>
-          <a:noFill/>
-        </p:spPr>
-        <p:txBody>
-          <a:bodyPr wrap="square">
-            <a:spAutoFit/>
-          </a:bodyPr>
-          <a:lstStyle/>
-          <a:p>
-            <a:pPr algn="l">
-              <a:defRPr sz="1100" b="0">
-                <a:solidFill>
-                  <a:srgbClr val="F59E0B"/>
-                </a:solidFill>
-              </a:defRPr>
-            </a:pPr>
-            <a:r>
-              <a:t>📆 Miércoles 2</a:t>
-            </a:r>
-          </a:p>
-        </p:txBody>
-      </p:sp>
-      <p:sp>
-        <p:nvSpPr>
-          <p:cNvPr id="29" name="TextBox 28"/>
-          <p:cNvSpPr txBox="1"/>
-          <p:nvPr/>
-        </p:nvSpPr>
-        <p:spPr>
-          <a:xfrm>
-            <a:off x="7863840" y="4480560"/>
-            <a:ext cx="1828800" cy="274320"/>
-          </a:xfrm>
-          <a:prstGeom prst="rect">
-            <a:avLst/>
-          </a:prstGeom>
-          <a:noFill/>
-        </p:spPr>
-        <p:txBody>
-          <a:bodyPr wrap="square">
-            <a:spAutoFit/>
-          </a:bodyPr>
-          <a:lstStyle/>
-          <a:p>
-            <a:pPr algn="l">
-              <a:defRPr sz="1200" b="1">
-                <a:solidFill>
-                  <a:srgbClr val="FFFFFF"/>
-                </a:solidFill>
-              </a:defRPr>
-            </a:pPr>
-            <a:r>
-              <a:t>🛡️ Julian Garzon</a:t>
-            </a:r>
-          </a:p>
-        </p:txBody>
-      </p:sp>
-      <p:sp>
-        <p:nvSpPr>
-          <p:cNvPr id="30" name="TextBox 29"/>
-          <p:cNvSpPr txBox="1"/>
-          <p:nvPr/>
-        </p:nvSpPr>
-        <p:spPr>
-          <a:xfrm>
-            <a:off x="9692640" y="4480560"/>
-            <a:ext cx="1371600" cy="274320"/>
-          </a:xfrm>
-          <a:prstGeom prst="rect">
-            <a:avLst/>
-          </a:prstGeom>
-          <a:noFill/>
-        </p:spPr>
-        <p:txBody>
-          <a:bodyPr wrap="square">
-            <a:spAutoFit/>
-          </a:bodyPr>
-          <a:lstStyle/>
-          <a:p>
-            <a:pPr algn="l">
-              <a:defRPr sz="1100" b="0">
-                <a:solidFill>
-                  <a:srgbClr val="9CA3AF"/>
-                </a:solidFill>
-              </a:defRPr>
-            </a:pPr>
-            <a:r>
-              <a:t>🏪 C.C Felicidad</a:t>
-            </a:r>
-          </a:p>
-        </p:txBody>
-      </p:sp>
-      <p:sp>
-        <p:nvSpPr>
-          <p:cNvPr id="31" name="TextBox 30"/>
-          <p:cNvSpPr txBox="1"/>
-          <p:nvPr/>
-        </p:nvSpPr>
-        <p:spPr>
-          <a:xfrm>
-            <a:off x="11064240" y="4480560"/>
-            <a:ext cx="1371600" cy="274320"/>
-          </a:xfrm>
-          <a:prstGeom prst="rect">
-            <a:avLst/>
-          </a:prstGeom>
-          <a:noFill/>
-        </p:spPr>
-        <p:txBody>
-          <a:bodyPr wrap="square">
-            <a:spAutoFit/>
-          </a:bodyPr>
-          <a:lstStyle/>
-          <a:p>
-            <a:pPr algn="l">
-              <a:defRPr sz="1100" b="0">
-                <a:solidFill>
-                  <a:srgbClr val="F59E0B"/>
-                </a:solidFill>
-              </a:defRPr>
-            </a:pPr>
-            <a:r>
-              <a:t>📆 Domingo 13</a:t>
-            </a:r>
-          </a:p>
-        </p:txBody>
-      </p:sp>
-      <p:sp>
-        <p:nvSpPr>
-          <p:cNvPr id="32" name="TextBox 31"/>
-          <p:cNvSpPr txBox="1"/>
-          <p:nvPr/>
-        </p:nvSpPr>
-        <p:spPr>
-          <a:xfrm>
-            <a:off x="914400" y="5074920"/>
-            <a:ext cx="1828800" cy="274320"/>
-          </a:xfrm>
-          <a:prstGeom prst="rect">
-            <a:avLst/>
-          </a:prstGeom>
-          <a:noFill/>
-        </p:spPr>
-        <p:txBody>
-          <a:bodyPr wrap="square">
-            <a:spAutoFit/>
-          </a:bodyPr>
-          <a:lstStyle/>
-          <a:p>
-            <a:pPr algn="l">
-              <a:defRPr sz="1200" b="1">
-                <a:solidFill>
-                  <a:srgbClr val="FFFFFF"/>
-                </a:solidFill>
-              </a:defRPr>
-            </a:pPr>
-            <a:r>
-              <a:t>🛡️ Jersoon Gonzalez</a:t>
-            </a:r>
-          </a:p>
-        </p:txBody>
-      </p:sp>
-      <p:sp>
-        <p:nvSpPr>
-          <p:cNvPr id="33" name="TextBox 32"/>
-          <p:cNvSpPr txBox="1"/>
-          <p:nvPr/>
-        </p:nvSpPr>
-        <p:spPr>
-          <a:xfrm>
-            <a:off x="2743200" y="5074920"/>
-            <a:ext cx="1371600" cy="274320"/>
-          </a:xfrm>
-          <a:prstGeom prst="rect">
-            <a:avLst/>
-          </a:prstGeom>
-          <a:noFill/>
-        </p:spPr>
-        <p:txBody>
-          <a:bodyPr wrap="square">
-            <a:spAutoFit/>
-          </a:bodyPr>
-          <a:lstStyle/>
-          <a:p>
-            <a:pPr algn="l">
-              <a:defRPr sz="1100" b="0">
-                <a:solidFill>
-                  <a:srgbClr val="9CA3AF"/>
-                </a:solidFill>
-              </a:defRPr>
-            </a:pPr>
-            <a:r>
-              <a:t>🏪 C.C Unicentro</a:t>
-            </a:r>
-          </a:p>
-        </p:txBody>
-      </p:sp>
-      <p:sp>
-        <p:nvSpPr>
-          <p:cNvPr id="34" name="TextBox 33"/>
-          <p:cNvSpPr txBox="1"/>
-          <p:nvPr/>
-        </p:nvSpPr>
-        <p:spPr>
-          <a:xfrm>
-            <a:off x="4114800" y="5074920"/>
-            <a:ext cx="1371600" cy="274320"/>
-          </a:xfrm>
-          <a:prstGeom prst="rect">
-            <a:avLst/>
-          </a:prstGeom>
-          <a:noFill/>
-        </p:spPr>
-        <p:txBody>
-          <a:bodyPr wrap="square">
-            <a:spAutoFit/>
-          </a:bodyPr>
-          <a:lstStyle/>
-          <a:p>
-            <a:pPr algn="l">
-              <a:defRPr sz="1100" b="0">
-                <a:solidFill>
-                  <a:srgbClr val="F59E0B"/>
-                </a:solidFill>
-              </a:defRPr>
-            </a:pPr>
-            <a:r>
-              <a:t>📆 Domingo 6</a:t>
-            </a:r>
-          </a:p>
-        </p:txBody>
-      </p:sp>
-      <p:sp>
-        <p:nvSpPr>
-          <p:cNvPr id="35" name="TextBox 34"/>
-          <p:cNvSpPr txBox="1"/>
-          <p:nvPr/>
-        </p:nvSpPr>
-        <p:spPr>
-          <a:xfrm>
-            <a:off x="4389120" y="5074920"/>
-            <a:ext cx="1828800" cy="274320"/>
-          </a:xfrm>
-          <a:prstGeom prst="rect">
-            <a:avLst/>
-          </a:prstGeom>
-          <a:noFill/>
-        </p:spPr>
-        <p:txBody>
-          <a:bodyPr wrap="square">
-            <a:spAutoFit/>
-          </a:bodyPr>
-          <a:lstStyle/>
-          <a:p>
-            <a:pPr algn="l">
-              <a:defRPr sz="1200" b="1">
-                <a:solidFill>
-                  <a:srgbClr val="FFFFFF"/>
-                </a:solidFill>
-              </a:defRPr>
-            </a:pPr>
-            <a:r>
-              <a:t>🛡️ Andres Bojaca</a:t>
-            </a:r>
-          </a:p>
-        </p:txBody>
-      </p:sp>
-      <p:sp>
-        <p:nvSpPr>
-          <p:cNvPr id="36" name="TextBox 35"/>
-          <p:cNvSpPr txBox="1"/>
-          <p:nvPr/>
-        </p:nvSpPr>
-        <p:spPr>
-          <a:xfrm>
-            <a:off x="6217920" y="5074920"/>
-            <a:ext cx="1371600" cy="274320"/>
-          </a:xfrm>
-          <a:prstGeom prst="rect">
-            <a:avLst/>
-          </a:prstGeom>
-          <a:noFill/>
-        </p:spPr>
-        <p:txBody>
-          <a:bodyPr wrap="square">
-            <a:spAutoFit/>
-          </a:bodyPr>
-          <a:lstStyle/>
-          <a:p>
-            <a:pPr algn="l">
-              <a:defRPr sz="1100" b="0">
-                <a:solidFill>
-                  <a:srgbClr val="9CA3AF"/>
-                </a:solidFill>
-              </a:defRPr>
-            </a:pPr>
-            <a:r>
-              <a:t>🏪 Bima</a:t>
-            </a:r>
-          </a:p>
-        </p:txBody>
-      </p:sp>
-      <p:sp>
-        <p:nvSpPr>
-          <p:cNvPr id="37" name="TextBox 36"/>
-          <p:cNvSpPr txBox="1"/>
-          <p:nvPr/>
-        </p:nvSpPr>
-        <p:spPr>
-          <a:xfrm>
-            <a:off x="7589520" y="5074920"/>
-            <a:ext cx="1371600" cy="274320"/>
-          </a:xfrm>
-          <a:prstGeom prst="rect">
-            <a:avLst/>
-          </a:prstGeom>
-          <a:noFill/>
-        </p:spPr>
-        <p:txBody>
-          <a:bodyPr wrap="square">
-            <a:spAutoFit/>
-          </a:bodyPr>
-          <a:lstStyle/>
-          <a:p>
-            <a:pPr algn="l">
-              <a:defRPr sz="1100" b="0">
-                <a:solidFill>
-                  <a:srgbClr val="F59E0B"/>
-                </a:solidFill>
-              </a:defRPr>
-            </a:pPr>
-            <a:r>
-              <a:t>📆 Dom 6, 13, 20, 27</a:t>
+              <a:t>⚠️  Guarda siempre los archivos JSON con codificación UTF-8 para que se muestren los acentos correctamente.</a:t>
             </a:r>
           </a:p>
         </p:txBody>
@@ -4718,6 +3965,1463 @@
         </p:nvSpPr>
         <p:spPr>
           <a:xfrm>
+            <a:off x="731520" y="365760"/>
+            <a:ext cx="7315200" cy="640080"/>
+          </a:xfrm>
+          <a:prstGeom prst="rect">
+            <a:avLst/>
+          </a:prstGeom>
+          <a:noFill/>
+        </p:spPr>
+        <p:txBody>
+          <a:bodyPr wrap="square">
+            <a:spAutoFit/>
+          </a:bodyPr>
+          <a:lstStyle/>
+          <a:p>
+            <a:pPr algn="l">
+              <a:defRPr sz="3200" b="1">
+                <a:solidFill>
+                  <a:srgbClr val="FFFFFF"/>
+                </a:solidFill>
+              </a:defRPr>
+            </a:pPr>
+            <a:r>
+              <a:t>Datos Actuales</a:t>
+            </a:r>
+          </a:p>
+        </p:txBody>
+      </p:sp>
+      <p:sp>
+        <p:nvSpPr>
+          <p:cNvPr id="4" name="Rounded Rectangle 3"/>
+          <p:cNvSpPr/>
+          <p:nvPr/>
+        </p:nvSpPr>
+        <p:spPr>
+          <a:xfrm>
+            <a:off x="731520" y="1280160"/>
+            <a:ext cx="5029200" cy="27432"/>
+          </a:xfrm>
+          <a:prstGeom prst="roundRect">
+            <a:avLst/>
+          </a:prstGeom>
+          <a:solidFill>
+            <a:srgbClr val="3B82F6"/>
+          </a:solidFill>
+          <a:ln>
+            <a:noFill/>
+          </a:ln>
+        </p:spPr>
+        <p:style>
+          <a:lnRef idx="1">
+            <a:schemeClr val="accent1"/>
+          </a:lnRef>
+          <a:fillRef idx="3">
+            <a:schemeClr val="accent1"/>
+          </a:fillRef>
+          <a:effectRef idx="2">
+            <a:schemeClr val="accent1"/>
+          </a:effectRef>
+          <a:fontRef idx="minor">
+            <a:schemeClr val="lt1"/>
+          </a:fontRef>
+        </p:style>
+        <p:txBody>
+          <a:bodyPr rtlCol="0" anchor="ctr"/>
+          <a:lstStyle/>
+          <a:p>
+            <a:pPr algn="ctr"/>
+          </a:p>
+        </p:txBody>
+      </p:sp>
+      <p:sp>
+        <p:nvSpPr>
+          <p:cNvPr id="5" name="Rounded Rectangle 4"/>
+          <p:cNvSpPr/>
+          <p:nvPr/>
+        </p:nvSpPr>
+        <p:spPr>
+          <a:xfrm>
+            <a:off x="731520" y="1645920"/>
+            <a:ext cx="2560320" cy="2011680"/>
+          </a:xfrm>
+          <a:prstGeom prst="roundRect">
+            <a:avLst>
+              <a:gd name="adj" fmla="val 5000"/>
+            </a:avLst>
+          </a:prstGeom>
+          <a:solidFill>
+            <a:srgbClr val="1A233B"/>
+          </a:solidFill>
+          <a:ln>
+            <a:noFill/>
+          </a:ln>
+        </p:spPr>
+        <p:style>
+          <a:lnRef idx="1">
+            <a:schemeClr val="accent1"/>
+          </a:lnRef>
+          <a:fillRef idx="3">
+            <a:schemeClr val="accent1"/>
+          </a:fillRef>
+          <a:effectRef idx="2">
+            <a:schemeClr val="accent1"/>
+          </a:effectRef>
+          <a:fontRef idx="minor">
+            <a:schemeClr val="lt1"/>
+          </a:fontRef>
+        </p:style>
+        <p:txBody>
+          <a:bodyPr rtlCol="0" anchor="ctr"/>
+          <a:lstStyle/>
+          <a:p>
+            <a:pPr algn="ctr"/>
+          </a:p>
+        </p:txBody>
+      </p:sp>
+      <p:sp>
+        <p:nvSpPr>
+          <p:cNvPr id="6" name="TextBox 5"/>
+          <p:cNvSpPr txBox="1"/>
+          <p:nvPr/>
+        </p:nvSpPr>
+        <p:spPr>
+          <a:xfrm>
+            <a:off x="731520" y="1828800"/>
+            <a:ext cx="2560320" cy="731520"/>
+          </a:xfrm>
+          <a:prstGeom prst="rect">
+            <a:avLst/>
+          </a:prstGeom>
+          <a:noFill/>
+        </p:spPr>
+        <p:txBody>
+          <a:bodyPr wrap="square">
+            <a:spAutoFit/>
+          </a:bodyPr>
+          <a:lstStyle/>
+          <a:p>
+            <a:pPr algn="ctr">
+              <a:defRPr sz="4800" b="1">
+                <a:solidFill>
+                  <a:srgbClr val="3B82F6"/>
+                </a:solidFill>
+              </a:defRPr>
+            </a:pPr>
+            <a:r>
+              <a:t>9</a:t>
+            </a:r>
+          </a:p>
+        </p:txBody>
+      </p:sp>
+      <p:sp>
+        <p:nvSpPr>
+          <p:cNvPr id="7" name="TextBox 6"/>
+          <p:cNvSpPr txBox="1"/>
+          <p:nvPr/>
+        </p:nvSpPr>
+        <p:spPr>
+          <a:xfrm>
+            <a:off x="731520" y="2560320"/>
+            <a:ext cx="2560320" cy="365760"/>
+          </a:xfrm>
+          <a:prstGeom prst="rect">
+            <a:avLst/>
+          </a:prstGeom>
+          <a:noFill/>
+        </p:spPr>
+        <p:txBody>
+          <a:bodyPr wrap="square">
+            <a:spAutoFit/>
+          </a:bodyPr>
+          <a:lstStyle/>
+          <a:p>
+            <a:pPr algn="ctr">
+              <a:defRPr sz="1800" b="1">
+                <a:solidFill>
+                  <a:srgbClr val="FFFFFF"/>
+                </a:solidFill>
+              </a:defRPr>
+            </a:pPr>
+            <a:r>
+              <a:t>Tiendas</a:t>
+            </a:r>
+          </a:p>
+        </p:txBody>
+      </p:sp>
+      <p:sp>
+        <p:nvSpPr>
+          <p:cNvPr id="8" name="TextBox 7"/>
+          <p:cNvSpPr txBox="1"/>
+          <p:nvPr/>
+        </p:nvSpPr>
+        <p:spPr>
+          <a:xfrm>
+            <a:off x="731520" y="2926080"/>
+            <a:ext cx="2560320" cy="365760"/>
+          </a:xfrm>
+          <a:prstGeom prst="rect">
+            <a:avLst/>
+          </a:prstGeom>
+          <a:noFill/>
+        </p:spPr>
+        <p:txBody>
+          <a:bodyPr wrap="square">
+            <a:spAutoFit/>
+          </a:bodyPr>
+          <a:lstStyle/>
+          <a:p>
+            <a:pPr algn="ctr">
+              <a:defRPr sz="1300" b="0">
+                <a:solidFill>
+                  <a:srgbClr val="9CA3AF"/>
+                </a:solidFill>
+              </a:defRPr>
+            </a:pPr>
+            <a:r>
+              <a:t>Todas en Colombia</a:t>
+            </a:r>
+          </a:p>
+        </p:txBody>
+      </p:sp>
+      <p:sp>
+        <p:nvSpPr>
+          <p:cNvPr id="9" name="Rounded Rectangle 8"/>
+          <p:cNvSpPr/>
+          <p:nvPr/>
+        </p:nvSpPr>
+        <p:spPr>
+          <a:xfrm>
+            <a:off x="3566160" y="1645920"/>
+            <a:ext cx="2560320" cy="2011680"/>
+          </a:xfrm>
+          <a:prstGeom prst="roundRect">
+            <a:avLst>
+              <a:gd name="adj" fmla="val 5000"/>
+            </a:avLst>
+          </a:prstGeom>
+          <a:solidFill>
+            <a:srgbClr val="1A233B"/>
+          </a:solidFill>
+          <a:ln>
+            <a:noFill/>
+          </a:ln>
+        </p:spPr>
+        <p:style>
+          <a:lnRef idx="1">
+            <a:schemeClr val="accent1"/>
+          </a:lnRef>
+          <a:fillRef idx="3">
+            <a:schemeClr val="accent1"/>
+          </a:fillRef>
+          <a:effectRef idx="2">
+            <a:schemeClr val="accent1"/>
+          </a:effectRef>
+          <a:fontRef idx="minor">
+            <a:schemeClr val="lt1"/>
+          </a:fontRef>
+        </p:style>
+        <p:txBody>
+          <a:bodyPr rtlCol="0" anchor="ctr"/>
+          <a:lstStyle/>
+          <a:p>
+            <a:pPr algn="ctr"/>
+          </a:p>
+        </p:txBody>
+      </p:sp>
+      <p:sp>
+        <p:nvSpPr>
+          <p:cNvPr id="10" name="TextBox 9"/>
+          <p:cNvSpPr txBox="1"/>
+          <p:nvPr/>
+        </p:nvSpPr>
+        <p:spPr>
+          <a:xfrm>
+            <a:off x="3566160" y="1828800"/>
+            <a:ext cx="2560320" cy="731520"/>
+          </a:xfrm>
+          <a:prstGeom prst="rect">
+            <a:avLst/>
+          </a:prstGeom>
+          <a:noFill/>
+        </p:spPr>
+        <p:txBody>
+          <a:bodyPr wrap="square">
+            <a:spAutoFit/>
+          </a:bodyPr>
+          <a:lstStyle/>
+          <a:p>
+            <a:pPr algn="ctr">
+              <a:defRPr sz="4800" b="1">
+                <a:solidFill>
+                  <a:srgbClr val="10B981"/>
+                </a:solidFill>
+              </a:defRPr>
+            </a:pPr>
+            <a:r>
+              <a:t>7</a:t>
+            </a:r>
+          </a:p>
+        </p:txBody>
+      </p:sp>
+      <p:sp>
+        <p:nvSpPr>
+          <p:cNvPr id="11" name="TextBox 10"/>
+          <p:cNvSpPr txBox="1"/>
+          <p:nvPr/>
+        </p:nvSpPr>
+        <p:spPr>
+          <a:xfrm>
+            <a:off x="3566160" y="2560320"/>
+            <a:ext cx="2560320" cy="365760"/>
+          </a:xfrm>
+          <a:prstGeom prst="rect">
+            <a:avLst/>
+          </a:prstGeom>
+          <a:noFill/>
+        </p:spPr>
+        <p:txBody>
+          <a:bodyPr wrap="square">
+            <a:spAutoFit/>
+          </a:bodyPr>
+          <a:lstStyle/>
+          <a:p>
+            <a:pPr algn="ctr">
+              <a:defRPr sz="1800" b="1">
+                <a:solidFill>
+                  <a:srgbClr val="FFFFFF"/>
+                </a:solidFill>
+              </a:defRPr>
+            </a:pPr>
+            <a:r>
+              <a:t>Empleados</a:t>
+            </a:r>
+          </a:p>
+        </p:txBody>
+      </p:sp>
+      <p:sp>
+        <p:nvSpPr>
+          <p:cNvPr id="12" name="TextBox 11"/>
+          <p:cNvSpPr txBox="1"/>
+          <p:nvPr/>
+        </p:nvSpPr>
+        <p:spPr>
+          <a:xfrm>
+            <a:off x="3566160" y="2926080"/>
+            <a:ext cx="2560320" cy="365760"/>
+          </a:xfrm>
+          <a:prstGeom prst="rect">
+            <a:avLst/>
+          </a:prstGeom>
+          <a:noFill/>
+        </p:spPr>
+        <p:txBody>
+          <a:bodyPr wrap="square">
+            <a:spAutoFit/>
+          </a:bodyPr>
+          <a:lstStyle/>
+          <a:p>
+            <a:pPr algn="ctr">
+              <a:defRPr sz="1300" b="0">
+                <a:solidFill>
+                  <a:srgbClr val="9CA3AF"/>
+                </a:solidFill>
+              </a:defRPr>
+            </a:pPr>
+            <a:r>
+              <a:t>Técnicos únicos</a:t>
+            </a:r>
+          </a:p>
+        </p:txBody>
+      </p:sp>
+      <p:sp>
+        <p:nvSpPr>
+          <p:cNvPr id="13" name="Rounded Rectangle 12"/>
+          <p:cNvSpPr/>
+          <p:nvPr/>
+        </p:nvSpPr>
+        <p:spPr>
+          <a:xfrm>
+            <a:off x="6400800" y="1645920"/>
+            <a:ext cx="2560320" cy="2011680"/>
+          </a:xfrm>
+          <a:prstGeom prst="roundRect">
+            <a:avLst>
+              <a:gd name="adj" fmla="val 5000"/>
+            </a:avLst>
+          </a:prstGeom>
+          <a:solidFill>
+            <a:srgbClr val="1A233B"/>
+          </a:solidFill>
+          <a:ln>
+            <a:noFill/>
+          </a:ln>
+        </p:spPr>
+        <p:style>
+          <a:lnRef idx="1">
+            <a:schemeClr val="accent1"/>
+          </a:lnRef>
+          <a:fillRef idx="3">
+            <a:schemeClr val="accent1"/>
+          </a:fillRef>
+          <a:effectRef idx="2">
+            <a:schemeClr val="accent1"/>
+          </a:effectRef>
+          <a:fontRef idx="minor">
+            <a:schemeClr val="lt1"/>
+          </a:fontRef>
+        </p:style>
+        <p:txBody>
+          <a:bodyPr rtlCol="0" anchor="ctr"/>
+          <a:lstStyle/>
+          <a:p>
+            <a:pPr algn="ctr"/>
+          </a:p>
+        </p:txBody>
+      </p:sp>
+      <p:sp>
+        <p:nvSpPr>
+          <p:cNvPr id="14" name="TextBox 13"/>
+          <p:cNvSpPr txBox="1"/>
+          <p:nvPr/>
+        </p:nvSpPr>
+        <p:spPr>
+          <a:xfrm>
+            <a:off x="6400800" y="1828800"/>
+            <a:ext cx="2560320" cy="731520"/>
+          </a:xfrm>
+          <a:prstGeom prst="rect">
+            <a:avLst/>
+          </a:prstGeom>
+          <a:noFill/>
+        </p:spPr>
+        <p:txBody>
+          <a:bodyPr wrap="square">
+            <a:spAutoFit/>
+          </a:bodyPr>
+          <a:lstStyle/>
+          <a:p>
+            <a:pPr algn="ctr">
+              <a:defRPr sz="4800" b="1">
+                <a:solidFill>
+                  <a:srgbClr val="F59E0B"/>
+                </a:solidFill>
+              </a:defRPr>
+            </a:pPr>
+            <a:r>
+              <a:t>192</a:t>
+            </a:r>
+          </a:p>
+        </p:txBody>
+      </p:sp>
+      <p:sp>
+        <p:nvSpPr>
+          <p:cNvPr id="15" name="TextBox 14"/>
+          <p:cNvSpPr txBox="1"/>
+          <p:nvPr/>
+        </p:nvSpPr>
+        <p:spPr>
+          <a:xfrm>
+            <a:off x="6400800" y="2560320"/>
+            <a:ext cx="2560320" cy="365760"/>
+          </a:xfrm>
+          <a:prstGeom prst="rect">
+            <a:avLst/>
+          </a:prstGeom>
+          <a:noFill/>
+        </p:spPr>
+        <p:txBody>
+          <a:bodyPr wrap="square">
+            <a:spAutoFit/>
+          </a:bodyPr>
+          <a:lstStyle/>
+          <a:p>
+            <a:pPr algn="ctr">
+              <a:defRPr sz="1800" b="1">
+                <a:solidFill>
+                  <a:srgbClr val="FFFFFF"/>
+                </a:solidFill>
+              </a:defRPr>
+            </a:pPr>
+            <a:r>
+              <a:t>Registros</a:t>
+            </a:r>
+          </a:p>
+        </p:txBody>
+      </p:sp>
+      <p:sp>
+        <p:nvSpPr>
+          <p:cNvPr id="16" name="TextBox 15"/>
+          <p:cNvSpPr txBox="1"/>
+          <p:nvPr/>
+        </p:nvSpPr>
+        <p:spPr>
+          <a:xfrm>
+            <a:off x="6400800" y="2926080"/>
+            <a:ext cx="2560320" cy="365760"/>
+          </a:xfrm>
+          <a:prstGeom prst="rect">
+            <a:avLst/>
+          </a:prstGeom>
+          <a:noFill/>
+        </p:spPr>
+        <p:txBody>
+          <a:bodyPr wrap="square">
+            <a:spAutoFit/>
+          </a:bodyPr>
+          <a:lstStyle/>
+          <a:p>
+            <a:pPr algn="ctr">
+              <a:defRPr sz="1300" b="0">
+                <a:solidFill>
+                  <a:srgbClr val="9CA3AF"/>
+                </a:solidFill>
+              </a:defRPr>
+            </a:pPr>
+            <a:r>
+              <a:t>Turnos de Septiembre</a:t>
+            </a:r>
+          </a:p>
+        </p:txBody>
+      </p:sp>
+      <p:sp>
+        <p:nvSpPr>
+          <p:cNvPr id="17" name="Rounded Rectangle 16"/>
+          <p:cNvSpPr/>
+          <p:nvPr/>
+        </p:nvSpPr>
+        <p:spPr>
+          <a:xfrm>
+            <a:off x="9235440" y="1645920"/>
+            <a:ext cx="2560320" cy="2011680"/>
+          </a:xfrm>
+          <a:prstGeom prst="roundRect">
+            <a:avLst>
+              <a:gd name="adj" fmla="val 5000"/>
+            </a:avLst>
+          </a:prstGeom>
+          <a:solidFill>
+            <a:srgbClr val="1A233B"/>
+          </a:solidFill>
+          <a:ln>
+            <a:noFill/>
+          </a:ln>
+        </p:spPr>
+        <p:style>
+          <a:lnRef idx="1">
+            <a:schemeClr val="accent1"/>
+          </a:lnRef>
+          <a:fillRef idx="3">
+            <a:schemeClr val="accent1"/>
+          </a:fillRef>
+          <a:effectRef idx="2">
+            <a:schemeClr val="accent1"/>
+          </a:effectRef>
+          <a:fontRef idx="minor">
+            <a:schemeClr val="lt1"/>
+          </a:fontRef>
+        </p:style>
+        <p:txBody>
+          <a:bodyPr rtlCol="0" anchor="ctr"/>
+          <a:lstStyle/>
+          <a:p>
+            <a:pPr algn="ctr"/>
+          </a:p>
+        </p:txBody>
+      </p:sp>
+      <p:sp>
+        <p:nvSpPr>
+          <p:cNvPr id="18" name="TextBox 17"/>
+          <p:cNvSpPr txBox="1"/>
+          <p:nvPr/>
+        </p:nvSpPr>
+        <p:spPr>
+          <a:xfrm>
+            <a:off x="9235440" y="1828800"/>
+            <a:ext cx="2560320" cy="731520"/>
+          </a:xfrm>
+          <a:prstGeom prst="rect">
+            <a:avLst/>
+          </a:prstGeom>
+          <a:noFill/>
+        </p:spPr>
+        <p:txBody>
+          <a:bodyPr wrap="square">
+            <a:spAutoFit/>
+          </a:bodyPr>
+          <a:lstStyle/>
+          <a:p>
+            <a:pPr algn="ctr">
+              <a:defRPr sz="4800" b="1">
+                <a:solidFill>
+                  <a:srgbClr val="3B82F6"/>
+                </a:solidFill>
+              </a:defRPr>
+            </a:pPr>
+            <a:r>
+              <a:t>12</a:t>
+            </a:r>
+          </a:p>
+        </p:txBody>
+      </p:sp>
+      <p:sp>
+        <p:nvSpPr>
+          <p:cNvPr id="19" name="TextBox 18"/>
+          <p:cNvSpPr txBox="1"/>
+          <p:nvPr/>
+        </p:nvSpPr>
+        <p:spPr>
+          <a:xfrm>
+            <a:off x="9235440" y="2560320"/>
+            <a:ext cx="2560320" cy="365760"/>
+          </a:xfrm>
+          <a:prstGeom prst="rect">
+            <a:avLst/>
+          </a:prstGeom>
+          <a:noFill/>
+        </p:spPr>
+        <p:txBody>
+          <a:bodyPr wrap="square">
+            <a:spAutoFit/>
+          </a:bodyPr>
+          <a:lstStyle/>
+          <a:p>
+            <a:pPr algn="ctr">
+              <a:defRPr sz="1800" b="1">
+                <a:solidFill>
+                  <a:srgbClr val="FFFFFF"/>
+                </a:solidFill>
+              </a:defRPr>
+            </a:pPr>
+            <a:r>
+              <a:t>Guardias</a:t>
+            </a:r>
+          </a:p>
+        </p:txBody>
+      </p:sp>
+      <p:sp>
+        <p:nvSpPr>
+          <p:cNvPr id="20" name="TextBox 19"/>
+          <p:cNvSpPr txBox="1"/>
+          <p:nvPr/>
+        </p:nvSpPr>
+        <p:spPr>
+          <a:xfrm>
+            <a:off x="9235440" y="2926080"/>
+            <a:ext cx="2560320" cy="365760"/>
+          </a:xfrm>
+          <a:prstGeom prst="rect">
+            <a:avLst/>
+          </a:prstGeom>
+          <a:noFill/>
+        </p:spPr>
+        <p:txBody>
+          <a:bodyPr wrap="square">
+            <a:spAutoFit/>
+          </a:bodyPr>
+          <a:lstStyle/>
+          <a:p>
+            <a:pPr algn="ctr">
+              <a:defRPr sz="1300" b="0">
+                <a:solidFill>
+                  <a:srgbClr val="9CA3AF"/>
+                </a:solidFill>
+              </a:defRPr>
+            </a:pPr>
+            <a:r>
+              <a:t>5 técnicos en 6 tiendas</a:t>
+            </a:r>
+          </a:p>
+        </p:txBody>
+      </p:sp>
+      <p:sp>
+        <p:nvSpPr>
+          <p:cNvPr id="21" name="Rounded Rectangle 20"/>
+          <p:cNvSpPr/>
+          <p:nvPr/>
+        </p:nvSpPr>
+        <p:spPr>
+          <a:xfrm>
+            <a:off x="731520" y="3931920"/>
+            <a:ext cx="10698480" cy="2011680"/>
+          </a:xfrm>
+          <a:prstGeom prst="roundRect">
+            <a:avLst>
+              <a:gd name="adj" fmla="val 4000"/>
+            </a:avLst>
+          </a:prstGeom>
+          <a:solidFill>
+            <a:srgbClr val="1A233B"/>
+          </a:solidFill>
+          <a:ln>
+            <a:noFill/>
+          </a:ln>
+        </p:spPr>
+        <p:style>
+          <a:lnRef idx="1">
+            <a:schemeClr val="accent1"/>
+          </a:lnRef>
+          <a:fillRef idx="3">
+            <a:schemeClr val="accent1"/>
+          </a:fillRef>
+          <a:effectRef idx="2">
+            <a:schemeClr val="accent1"/>
+          </a:effectRef>
+          <a:fontRef idx="minor">
+            <a:schemeClr val="lt1"/>
+          </a:fontRef>
+        </p:style>
+        <p:txBody>
+          <a:bodyPr rtlCol="0" anchor="ctr"/>
+          <a:lstStyle/>
+          <a:p>
+            <a:pPr algn="ctr"/>
+          </a:p>
+        </p:txBody>
+      </p:sp>
+      <p:sp>
+        <p:nvSpPr>
+          <p:cNvPr id="22" name="TextBox 21"/>
+          <p:cNvSpPr txBox="1"/>
+          <p:nvPr/>
+        </p:nvSpPr>
+        <p:spPr>
+          <a:xfrm>
+            <a:off x="914400" y="4023360"/>
+            <a:ext cx="4572000" cy="365760"/>
+          </a:xfrm>
+          <a:prstGeom prst="rect">
+            <a:avLst/>
+          </a:prstGeom>
+          <a:noFill/>
+        </p:spPr>
+        <p:txBody>
+          <a:bodyPr wrap="square">
+            <a:spAutoFit/>
+          </a:bodyPr>
+          <a:lstStyle/>
+          <a:p>
+            <a:pPr algn="l">
+              <a:defRPr sz="1600" b="1">
+                <a:solidFill>
+                  <a:srgbClr val="F59E0B"/>
+                </a:solidFill>
+              </a:defRPr>
+            </a:pPr>
+            <a:r>
+              <a:t>Guardias de Septiembre 2026</a:t>
+            </a:r>
+          </a:p>
+        </p:txBody>
+      </p:sp>
+      <p:sp>
+        <p:nvSpPr>
+          <p:cNvPr id="23" name="TextBox 22"/>
+          <p:cNvSpPr txBox="1"/>
+          <p:nvPr/>
+        </p:nvSpPr>
+        <p:spPr>
+          <a:xfrm>
+            <a:off x="914400" y="4480560"/>
+            <a:ext cx="1828800" cy="274320"/>
+          </a:xfrm>
+          <a:prstGeom prst="rect">
+            <a:avLst/>
+          </a:prstGeom>
+          <a:noFill/>
+        </p:spPr>
+        <p:txBody>
+          <a:bodyPr wrap="square">
+            <a:spAutoFit/>
+          </a:bodyPr>
+          <a:lstStyle/>
+          <a:p>
+            <a:pPr algn="l">
+              <a:defRPr sz="1200" b="1">
+                <a:solidFill>
+                  <a:srgbClr val="FFFFFF"/>
+                </a:solidFill>
+              </a:defRPr>
+            </a:pPr>
+            <a:r>
+              <a:t>🛡️ Kevin Alean</a:t>
+            </a:r>
+          </a:p>
+        </p:txBody>
+      </p:sp>
+      <p:sp>
+        <p:nvSpPr>
+          <p:cNvPr id="24" name="TextBox 23"/>
+          <p:cNvSpPr txBox="1"/>
+          <p:nvPr/>
+        </p:nvSpPr>
+        <p:spPr>
+          <a:xfrm>
+            <a:off x="2743200" y="4480560"/>
+            <a:ext cx="1371600" cy="274320"/>
+          </a:xfrm>
+          <a:prstGeom prst="rect">
+            <a:avLst/>
+          </a:prstGeom>
+          <a:noFill/>
+        </p:spPr>
+        <p:txBody>
+          <a:bodyPr wrap="square">
+            <a:spAutoFit/>
+          </a:bodyPr>
+          <a:lstStyle/>
+          <a:p>
+            <a:pPr algn="l">
+              <a:defRPr sz="1100" b="0">
+                <a:solidFill>
+                  <a:srgbClr val="9CA3AF"/>
+                </a:solidFill>
+              </a:defRPr>
+            </a:pPr>
+            <a:r>
+              <a:t>🏪 C.C Colina</a:t>
+            </a:r>
+          </a:p>
+        </p:txBody>
+      </p:sp>
+      <p:sp>
+        <p:nvSpPr>
+          <p:cNvPr id="25" name="TextBox 24"/>
+          <p:cNvSpPr txBox="1"/>
+          <p:nvPr/>
+        </p:nvSpPr>
+        <p:spPr>
+          <a:xfrm>
+            <a:off x="4114800" y="4480560"/>
+            <a:ext cx="1371600" cy="274320"/>
+          </a:xfrm>
+          <a:prstGeom prst="rect">
+            <a:avLst/>
+          </a:prstGeom>
+          <a:noFill/>
+        </p:spPr>
+        <p:txBody>
+          <a:bodyPr wrap="square">
+            <a:spAutoFit/>
+          </a:bodyPr>
+          <a:lstStyle/>
+          <a:p>
+            <a:pPr algn="l">
+              <a:defRPr sz="1100" b="0">
+                <a:solidFill>
+                  <a:srgbClr val="F59E0B"/>
+                </a:solidFill>
+              </a:defRPr>
+            </a:pPr>
+            <a:r>
+              <a:t>📆 Domingo 20</a:t>
+            </a:r>
+          </a:p>
+        </p:txBody>
+      </p:sp>
+      <p:sp>
+        <p:nvSpPr>
+          <p:cNvPr id="26" name="TextBox 25"/>
+          <p:cNvSpPr txBox="1"/>
+          <p:nvPr/>
+        </p:nvSpPr>
+        <p:spPr>
+          <a:xfrm>
+            <a:off x="4389120" y="4480560"/>
+            <a:ext cx="1828800" cy="274320"/>
+          </a:xfrm>
+          <a:prstGeom prst="rect">
+            <a:avLst/>
+          </a:prstGeom>
+          <a:noFill/>
+        </p:spPr>
+        <p:txBody>
+          <a:bodyPr wrap="square">
+            <a:spAutoFit/>
+          </a:bodyPr>
+          <a:lstStyle/>
+          <a:p>
+            <a:pPr algn="l">
+              <a:defRPr sz="1200" b="1">
+                <a:solidFill>
+                  <a:srgbClr val="FFFFFF"/>
+                </a:solidFill>
+              </a:defRPr>
+            </a:pPr>
+            <a:r>
+              <a:t>🛡️ Angel Ortiz</a:t>
+            </a:r>
+          </a:p>
+        </p:txBody>
+      </p:sp>
+      <p:sp>
+        <p:nvSpPr>
+          <p:cNvPr id="27" name="TextBox 26"/>
+          <p:cNvSpPr txBox="1"/>
+          <p:nvPr/>
+        </p:nvSpPr>
+        <p:spPr>
+          <a:xfrm>
+            <a:off x="6217920" y="4480560"/>
+            <a:ext cx="1371600" cy="274320"/>
+          </a:xfrm>
+          <a:prstGeom prst="rect">
+            <a:avLst/>
+          </a:prstGeom>
+          <a:noFill/>
+        </p:spPr>
+        <p:txBody>
+          <a:bodyPr wrap="square">
+            <a:spAutoFit/>
+          </a:bodyPr>
+          <a:lstStyle/>
+          <a:p>
+            <a:pPr algn="l">
+              <a:defRPr sz="1100" b="0">
+                <a:solidFill>
+                  <a:srgbClr val="9CA3AF"/>
+                </a:solidFill>
+              </a:defRPr>
+            </a:pPr>
+            <a:r>
+              <a:t>🏪 Zona Calle 82</a:t>
+            </a:r>
+          </a:p>
+        </p:txBody>
+      </p:sp>
+      <p:sp>
+        <p:nvSpPr>
+          <p:cNvPr id="28" name="TextBox 27"/>
+          <p:cNvSpPr txBox="1"/>
+          <p:nvPr/>
+        </p:nvSpPr>
+        <p:spPr>
+          <a:xfrm>
+            <a:off x="7589520" y="4480560"/>
+            <a:ext cx="1371600" cy="274320"/>
+          </a:xfrm>
+          <a:prstGeom prst="rect">
+            <a:avLst/>
+          </a:prstGeom>
+          <a:noFill/>
+        </p:spPr>
+        <p:txBody>
+          <a:bodyPr wrap="square">
+            <a:spAutoFit/>
+          </a:bodyPr>
+          <a:lstStyle/>
+          <a:p>
+            <a:pPr algn="l">
+              <a:defRPr sz="1100" b="0">
+                <a:solidFill>
+                  <a:srgbClr val="F59E0B"/>
+                </a:solidFill>
+              </a:defRPr>
+            </a:pPr>
+            <a:r>
+              <a:t>📆 Miércoles 2</a:t>
+            </a:r>
+          </a:p>
+        </p:txBody>
+      </p:sp>
+      <p:sp>
+        <p:nvSpPr>
+          <p:cNvPr id="29" name="TextBox 28"/>
+          <p:cNvSpPr txBox="1"/>
+          <p:nvPr/>
+        </p:nvSpPr>
+        <p:spPr>
+          <a:xfrm>
+            <a:off x="7863840" y="4480560"/>
+            <a:ext cx="1828800" cy="274320"/>
+          </a:xfrm>
+          <a:prstGeom prst="rect">
+            <a:avLst/>
+          </a:prstGeom>
+          <a:noFill/>
+        </p:spPr>
+        <p:txBody>
+          <a:bodyPr wrap="square">
+            <a:spAutoFit/>
+          </a:bodyPr>
+          <a:lstStyle/>
+          <a:p>
+            <a:pPr algn="l">
+              <a:defRPr sz="1200" b="1">
+                <a:solidFill>
+                  <a:srgbClr val="FFFFFF"/>
+                </a:solidFill>
+              </a:defRPr>
+            </a:pPr>
+            <a:r>
+              <a:t>🛡️ Julian Garzon</a:t>
+            </a:r>
+          </a:p>
+        </p:txBody>
+      </p:sp>
+      <p:sp>
+        <p:nvSpPr>
+          <p:cNvPr id="30" name="TextBox 29"/>
+          <p:cNvSpPr txBox="1"/>
+          <p:nvPr/>
+        </p:nvSpPr>
+        <p:spPr>
+          <a:xfrm>
+            <a:off x="9692640" y="4480560"/>
+            <a:ext cx="1371600" cy="274320"/>
+          </a:xfrm>
+          <a:prstGeom prst="rect">
+            <a:avLst/>
+          </a:prstGeom>
+          <a:noFill/>
+        </p:spPr>
+        <p:txBody>
+          <a:bodyPr wrap="square">
+            <a:spAutoFit/>
+          </a:bodyPr>
+          <a:lstStyle/>
+          <a:p>
+            <a:pPr algn="l">
+              <a:defRPr sz="1100" b="0">
+                <a:solidFill>
+                  <a:srgbClr val="9CA3AF"/>
+                </a:solidFill>
+              </a:defRPr>
+            </a:pPr>
+            <a:r>
+              <a:t>🏪 C.C Felicidad</a:t>
+            </a:r>
+          </a:p>
+        </p:txBody>
+      </p:sp>
+      <p:sp>
+        <p:nvSpPr>
+          <p:cNvPr id="31" name="TextBox 30"/>
+          <p:cNvSpPr txBox="1"/>
+          <p:nvPr/>
+        </p:nvSpPr>
+        <p:spPr>
+          <a:xfrm>
+            <a:off x="11064240" y="4480560"/>
+            <a:ext cx="1371600" cy="274320"/>
+          </a:xfrm>
+          <a:prstGeom prst="rect">
+            <a:avLst/>
+          </a:prstGeom>
+          <a:noFill/>
+        </p:spPr>
+        <p:txBody>
+          <a:bodyPr wrap="square">
+            <a:spAutoFit/>
+          </a:bodyPr>
+          <a:lstStyle/>
+          <a:p>
+            <a:pPr algn="l">
+              <a:defRPr sz="1100" b="0">
+                <a:solidFill>
+                  <a:srgbClr val="F59E0B"/>
+                </a:solidFill>
+              </a:defRPr>
+            </a:pPr>
+            <a:r>
+              <a:t>📆 Domingo 13</a:t>
+            </a:r>
+          </a:p>
+        </p:txBody>
+      </p:sp>
+      <p:sp>
+        <p:nvSpPr>
+          <p:cNvPr id="32" name="TextBox 31"/>
+          <p:cNvSpPr txBox="1"/>
+          <p:nvPr/>
+        </p:nvSpPr>
+        <p:spPr>
+          <a:xfrm>
+            <a:off x="914400" y="5074920"/>
+            <a:ext cx="1828800" cy="274320"/>
+          </a:xfrm>
+          <a:prstGeom prst="rect">
+            <a:avLst/>
+          </a:prstGeom>
+          <a:noFill/>
+        </p:spPr>
+        <p:txBody>
+          <a:bodyPr wrap="square">
+            <a:spAutoFit/>
+          </a:bodyPr>
+          <a:lstStyle/>
+          <a:p>
+            <a:pPr algn="l">
+              <a:defRPr sz="1200" b="1">
+                <a:solidFill>
+                  <a:srgbClr val="FFFFFF"/>
+                </a:solidFill>
+              </a:defRPr>
+            </a:pPr>
+            <a:r>
+              <a:t>🛡️ Jersoon Gonzalez</a:t>
+            </a:r>
+          </a:p>
+        </p:txBody>
+      </p:sp>
+      <p:sp>
+        <p:nvSpPr>
+          <p:cNvPr id="33" name="TextBox 32"/>
+          <p:cNvSpPr txBox="1"/>
+          <p:nvPr/>
+        </p:nvSpPr>
+        <p:spPr>
+          <a:xfrm>
+            <a:off x="2743200" y="5074920"/>
+            <a:ext cx="1371600" cy="274320"/>
+          </a:xfrm>
+          <a:prstGeom prst="rect">
+            <a:avLst/>
+          </a:prstGeom>
+          <a:noFill/>
+        </p:spPr>
+        <p:txBody>
+          <a:bodyPr wrap="square">
+            <a:spAutoFit/>
+          </a:bodyPr>
+          <a:lstStyle/>
+          <a:p>
+            <a:pPr algn="l">
+              <a:defRPr sz="1100" b="0">
+                <a:solidFill>
+                  <a:srgbClr val="9CA3AF"/>
+                </a:solidFill>
+              </a:defRPr>
+            </a:pPr>
+            <a:r>
+              <a:t>🏪 C.C Unicentro</a:t>
+            </a:r>
+          </a:p>
+        </p:txBody>
+      </p:sp>
+      <p:sp>
+        <p:nvSpPr>
+          <p:cNvPr id="34" name="TextBox 33"/>
+          <p:cNvSpPr txBox="1"/>
+          <p:nvPr/>
+        </p:nvSpPr>
+        <p:spPr>
+          <a:xfrm>
+            <a:off x="4114800" y="5074920"/>
+            <a:ext cx="1371600" cy="274320"/>
+          </a:xfrm>
+          <a:prstGeom prst="rect">
+            <a:avLst/>
+          </a:prstGeom>
+          <a:noFill/>
+        </p:spPr>
+        <p:txBody>
+          <a:bodyPr wrap="square">
+            <a:spAutoFit/>
+          </a:bodyPr>
+          <a:lstStyle/>
+          <a:p>
+            <a:pPr algn="l">
+              <a:defRPr sz="1100" b="0">
+                <a:solidFill>
+                  <a:srgbClr val="F59E0B"/>
+                </a:solidFill>
+              </a:defRPr>
+            </a:pPr>
+            <a:r>
+              <a:t>📆 Domingo 6</a:t>
+            </a:r>
+          </a:p>
+        </p:txBody>
+      </p:sp>
+      <p:sp>
+        <p:nvSpPr>
+          <p:cNvPr id="35" name="TextBox 34"/>
+          <p:cNvSpPr txBox="1"/>
+          <p:nvPr/>
+        </p:nvSpPr>
+        <p:spPr>
+          <a:xfrm>
+            <a:off x="4389120" y="5074920"/>
+            <a:ext cx="1828800" cy="274320"/>
+          </a:xfrm>
+          <a:prstGeom prst="rect">
+            <a:avLst/>
+          </a:prstGeom>
+          <a:noFill/>
+        </p:spPr>
+        <p:txBody>
+          <a:bodyPr wrap="square">
+            <a:spAutoFit/>
+          </a:bodyPr>
+          <a:lstStyle/>
+          <a:p>
+            <a:pPr algn="l">
+              <a:defRPr sz="1200" b="1">
+                <a:solidFill>
+                  <a:srgbClr val="FFFFFF"/>
+                </a:solidFill>
+              </a:defRPr>
+            </a:pPr>
+            <a:r>
+              <a:t>🛡️ Andres Bojaca</a:t>
+            </a:r>
+          </a:p>
+        </p:txBody>
+      </p:sp>
+      <p:sp>
+        <p:nvSpPr>
+          <p:cNvPr id="36" name="TextBox 35"/>
+          <p:cNvSpPr txBox="1"/>
+          <p:nvPr/>
+        </p:nvSpPr>
+        <p:spPr>
+          <a:xfrm>
+            <a:off x="6217920" y="5074920"/>
+            <a:ext cx="1371600" cy="274320"/>
+          </a:xfrm>
+          <a:prstGeom prst="rect">
+            <a:avLst/>
+          </a:prstGeom>
+          <a:noFill/>
+        </p:spPr>
+        <p:txBody>
+          <a:bodyPr wrap="square">
+            <a:spAutoFit/>
+          </a:bodyPr>
+          <a:lstStyle/>
+          <a:p>
+            <a:pPr algn="l">
+              <a:defRPr sz="1100" b="0">
+                <a:solidFill>
+                  <a:srgbClr val="9CA3AF"/>
+                </a:solidFill>
+              </a:defRPr>
+            </a:pPr>
+            <a:r>
+              <a:t>🏪 Bima</a:t>
+            </a:r>
+          </a:p>
+        </p:txBody>
+      </p:sp>
+      <p:sp>
+        <p:nvSpPr>
+          <p:cNvPr id="37" name="TextBox 36"/>
+          <p:cNvSpPr txBox="1"/>
+          <p:nvPr/>
+        </p:nvSpPr>
+        <p:spPr>
+          <a:xfrm>
+            <a:off x="7589520" y="5074920"/>
+            <a:ext cx="1371600" cy="274320"/>
+          </a:xfrm>
+          <a:prstGeom prst="rect">
+            <a:avLst/>
+          </a:prstGeom>
+          <a:noFill/>
+        </p:spPr>
+        <p:txBody>
+          <a:bodyPr wrap="square">
+            <a:spAutoFit/>
+          </a:bodyPr>
+          <a:lstStyle/>
+          <a:p>
+            <a:pPr algn="l">
+              <a:defRPr sz="1100" b="0">
+                <a:solidFill>
+                  <a:srgbClr val="F59E0B"/>
+                </a:solidFill>
+              </a:defRPr>
+            </a:pPr>
+            <a:r>
+              <a:t>📆 Dom 6, 13, 20, 27</a:t>
+            </a:r>
+          </a:p>
+        </p:txBody>
+      </p:sp>
+      <p:sp>
+        <p:nvSpPr>
+          <p:cNvPr id="38" name="TextBox 37"/>
+          <p:cNvSpPr txBox="1"/>
+          <p:nvPr/>
+        </p:nvSpPr>
+        <p:spPr>
+          <a:xfrm>
+            <a:off x="7863840" y="5074920"/>
+            <a:ext cx="1828800" cy="274320"/>
+          </a:xfrm>
+          <a:prstGeom prst="rect">
+            <a:avLst/>
+          </a:prstGeom>
+          <a:noFill/>
+        </p:spPr>
+        <p:txBody>
+          <a:bodyPr wrap="square">
+            <a:spAutoFit/>
+          </a:bodyPr>
+          <a:lstStyle/>
+          <a:p>
+            <a:pPr algn="l">
+              <a:defRPr sz="1200" b="1">
+                <a:solidFill>
+                  <a:srgbClr val="FFFFFF"/>
+                </a:solidFill>
+              </a:defRPr>
+            </a:pPr>
+            <a:r>
+              <a:t>🛡️ Andres Bojaca</a:t>
+            </a:r>
+          </a:p>
+        </p:txBody>
+      </p:sp>
+      <p:sp>
+        <p:nvSpPr>
+          <p:cNvPr id="39" name="TextBox 38"/>
+          <p:cNvSpPr txBox="1"/>
+          <p:nvPr/>
+        </p:nvSpPr>
+        <p:spPr>
+          <a:xfrm>
+            <a:off x="9692640" y="5074920"/>
+            <a:ext cx="1371600" cy="274320"/>
+          </a:xfrm>
+          <a:prstGeom prst="rect">
+            <a:avLst/>
+          </a:prstGeom>
+          <a:noFill/>
+        </p:spPr>
+        <p:txBody>
+          <a:bodyPr wrap="square">
+            <a:spAutoFit/>
+          </a:bodyPr>
+          <a:lstStyle/>
+          <a:p>
+            <a:pPr algn="l">
+              <a:defRPr sz="1100" b="0">
+                <a:solidFill>
+                  <a:srgbClr val="9CA3AF"/>
+                </a:solidFill>
+              </a:defRPr>
+            </a:pPr>
+            <a:r>
+              <a:t>🏪 C.C Fontanar</a:t>
+            </a:r>
+          </a:p>
+        </p:txBody>
+      </p:sp>
+      <p:sp>
+        <p:nvSpPr>
+          <p:cNvPr id="40" name="TextBox 39"/>
+          <p:cNvSpPr txBox="1"/>
+          <p:nvPr/>
+        </p:nvSpPr>
+        <p:spPr>
+          <a:xfrm>
+            <a:off x="11064240" y="5074920"/>
+            <a:ext cx="1371600" cy="274320"/>
+          </a:xfrm>
+          <a:prstGeom prst="rect">
+            <a:avLst/>
+          </a:prstGeom>
+          <a:noFill/>
+        </p:spPr>
+        <p:txBody>
+          <a:bodyPr wrap="square">
+            <a:spAutoFit/>
+          </a:bodyPr>
+          <a:lstStyle/>
+          <a:p>
+            <a:pPr algn="l">
+              <a:defRPr sz="1100" b="0">
+                <a:solidFill>
+                  <a:srgbClr val="F59E0B"/>
+                </a:solidFill>
+              </a:defRPr>
+            </a:pPr>
+            <a:r>
+              <a:t>📆 Dom 6, 13, 20, 27</a:t>
+            </a:r>
+          </a:p>
+        </p:txBody>
+      </p:sp>
+    </p:spTree>
+  </p:cSld>
+  <p:clrMapOvr>
+    <a:masterClrMapping/>
+  </p:clrMapOvr>
+</p:sld>
+</file>
+
+<file path=ppt/slides/slide12.xml><?xml version="1.0" encoding="utf-8"?>
+<p:sld xmlns:a="http://schemas.openxmlformats.org/drawingml/2006/main" xmlns:p="http://schemas.openxmlformats.org/presentationml/2006/main" xmlns:r="http://schemas.openxmlformats.org/officeDocument/2006/relationships">
+  <p:cSld>
+    <p:bg>
+      <p:bgPr>
+        <a:solidFill>
+          <a:srgbClr val="0F172A"/>
+        </a:solidFill>
+        <a:effectLst/>
+      </p:bgPr>
+    </p:bg>
+    <p:spTree>
+      <p:nvGrpSpPr>
+        <p:cNvPr id="1" name=""/>
+        <p:cNvGrpSpPr/>
+        <p:nvPr/>
+      </p:nvGrpSpPr>
+      <p:grpSpPr/>
+      <p:sp>
+        <p:nvSpPr>
+          <p:cNvPr id="2" name="Rounded Rectangle 1"/>
+          <p:cNvSpPr/>
+          <p:nvPr/>
+        </p:nvSpPr>
+        <p:spPr>
+          <a:xfrm>
+            <a:off x="0" y="0"/>
+            <a:ext cx="12191695" cy="73152"/>
+          </a:xfrm>
+          <a:prstGeom prst="roundRect">
+            <a:avLst/>
+          </a:prstGeom>
+          <a:solidFill>
+            <a:srgbClr val="3B82F6"/>
+          </a:solidFill>
+          <a:ln>
+            <a:noFill/>
+          </a:ln>
+        </p:spPr>
+        <p:style>
+          <a:lnRef idx="1">
+            <a:schemeClr val="accent1"/>
+          </a:lnRef>
+          <a:fillRef idx="3">
+            <a:schemeClr val="accent1"/>
+          </a:fillRef>
+          <a:effectRef idx="2">
+            <a:schemeClr val="accent1"/>
+          </a:effectRef>
+          <a:fontRef idx="minor">
+            <a:schemeClr val="lt1"/>
+          </a:fontRef>
+        </p:style>
+        <p:txBody>
+          <a:bodyPr rtlCol="0" anchor="ctr"/>
+          <a:lstStyle/>
+          <a:p>
+            <a:pPr algn="ctr"/>
+          </a:p>
+        </p:txBody>
+      </p:sp>
+      <p:sp>
+        <p:nvSpPr>
+          <p:cNvPr id="3" name="TextBox 2"/>
+          <p:cNvSpPr txBox="1"/>
+          <p:nvPr/>
+        </p:nvSpPr>
+        <p:spPr>
+          <a:xfrm>
             <a:off x="2743200" y="2011680"/>
             <a:ext cx="6675120" cy="914400"/>
           </a:xfrm>
@@ -4845,7 +5549,7 @@
               </a:defRPr>
             </a:pPr>
             <a:r>
-              <a:t>Septiembre 2026  •  v1.0  •  GitHub + Vercel</a:t>
+              <a:t>Septiembre 2026  •  v1.1  •  GitHub + Vercel</a:t>
             </a:r>
           </a:p>
         </p:txBody>
@@ -9073,7 +9777,7 @@
               </a:defRPr>
             </a:pPr>
             <a:r>
-              <a:t>Todas las guardias en un solo lugar</a:t>
+              <a:t>Guardias por ciudad</a:t>
             </a:r>
           </a:p>
         </p:txBody>
@@ -9781,14 +10485,14 @@
           <a:lstStyle/>
           <a:p>
             <a:pPr algn="l">
-              <a:defRPr sz="3200" b="1">
+              <a:defRPr sz="3000" b="1">
                 <a:solidFill>
                   <a:srgbClr val="FFFFFF"/>
                 </a:solidFill>
               </a:defRPr>
             </a:pPr>
             <a:r>
-              <a:t>Tooltip: Info del Técnico</a:t>
+              <a:t>Filtro libre (varios países / ciudades)</a:t>
             </a:r>
           </a:p>
         </p:txBody>
@@ -9802,7 +10506,7 @@
         <p:spPr>
           <a:xfrm>
             <a:off x="731520" y="1280160"/>
-            <a:ext cx="5029200" cy="27432"/>
+            <a:ext cx="7315200" cy="27432"/>
           </a:xfrm>
           <a:prstGeom prst="roundRect">
             <a:avLst/>
@@ -9845,7 +10549,7 @@
         <p:spPr>
           <a:xfrm>
             <a:off x="731520" y="1645920"/>
-            <a:ext cx="5029200" cy="457200"/>
+            <a:ext cx="5486400" cy="457200"/>
           </a:xfrm>
           <a:prstGeom prst="rect">
             <a:avLst/>
@@ -9859,14 +10563,14 @@
           <a:lstStyle/>
           <a:p>
             <a:pPr algn="l">
-              <a:defRPr sz="2000" b="1">
+              <a:defRPr sz="1800" b="1">
                 <a:solidFill>
                   <a:srgbClr val="10B981"/>
                 </a:solidFill>
               </a:defRPr>
             </a:pPr>
             <a:r>
-              <a:t>Pasa el cursor sobre cualquier turno</a:t>
+              <a:t>Modo aparte: no modifica el esquema principal</a:t>
             </a:r>
           </a:p>
         </p:txBody>
@@ -9879,8 +10583,8 @@
         </p:nvSpPr>
         <p:spPr>
           <a:xfrm>
-            <a:off x="731520" y="2286000"/>
-            <a:ext cx="5029200" cy="1828800"/>
+            <a:off x="731520" y="2194560"/>
+            <a:ext cx="5486400" cy="3474720"/>
           </a:xfrm>
           <a:prstGeom prst="rect">
             <a:avLst/>
@@ -9897,14 +10601,14 @@
               <a:spcAft>
                 <a:spcPts val="800"/>
               </a:spcAft>
-              <a:defRPr sz="1500">
+              <a:defRPr sz="1400">
                 <a:solidFill>
                   <a:srgbClr val="E5E7EB"/>
                 </a:solidFill>
               </a:defRPr>
             </a:pPr>
             <a:r>
-              <a:t>• Foto grande del técnico</a:t>
+              <a:t>• Botón morado "🎛️ Filtro libre" arriba</a:t>
             </a:r>
           </a:p>
           <a:p>
@@ -9912,14 +10616,14 @@
               <a:spcAft>
                 <a:spcPts val="800"/>
               </a:spcAft>
-              <a:defRPr sz="1500">
+              <a:defRPr sz="1400">
                 <a:solidFill>
                   <a:srgbClr val="E5E7EB"/>
                 </a:solidFill>
               </a:defRPr>
             </a:pPr>
             <a:r>
-              <a:t>• Nombre completo</a:t>
+              <a:t>• Marca varios países y ciudades a la vez</a:t>
             </a:r>
           </a:p>
           <a:p>
@@ -9927,14 +10631,14 @@
               <a:spcAft>
                 <a:spcPts val="800"/>
               </a:spcAft>
-              <a:defRPr sz="1500">
+              <a:defRPr sz="1400">
                 <a:solidFill>
                   <a:srgbClr val="E5E7EB"/>
                 </a:solidFill>
               </a:defRPr>
             </a:pPr>
             <a:r>
-              <a:t>• Correo electrónico</a:t>
+              <a:t>• Botones: "Seleccionar todas" / "Quitar todas"</a:t>
             </a:r>
           </a:p>
           <a:p>
@@ -9942,14 +10646,14 @@
               <a:spcAft>
                 <a:spcPts val="800"/>
               </a:spcAft>
-              <a:defRPr sz="1500">
+              <a:defRPr sz="1400">
                 <a:solidFill>
                   <a:srgbClr val="E5E7EB"/>
                 </a:solidFill>
               </a:defRPr>
             </a:pPr>
             <a:r>
-              <a:t>• Teléfono de contacto</a:t>
+              <a:t>• Mostrar guardias + calendarios de cada tienda</a:t>
             </a:r>
           </a:p>
           <a:p>
@@ -9957,14 +10661,14 @@
               <a:spcAft>
                 <a:spcPts val="800"/>
               </a:spcAft>
-              <a:defRPr sz="1500">
+              <a:defRPr sz="1400">
                 <a:solidFill>
                   <a:srgbClr val="E5E7EB"/>
                 </a:solidFill>
               </a:defRPr>
             </a:pPr>
             <a:r>
-              <a:t>• Tienda asignada</a:t>
+              <a:t>• Agrupado por país y por ciudad</a:t>
             </a:r>
           </a:p>
           <a:p>
@@ -9972,14 +10676,29 @@
               <a:spcAft>
                 <a:spcPts val="800"/>
               </a:spcAft>
-              <a:defRPr sz="1500">
+              <a:defRPr sz="1400">
                 <a:solidFill>
                   <a:srgbClr val="E5E7EB"/>
                 </a:solidFill>
               </a:defRPr>
             </a:pPr>
             <a:r>
-              <a:t>• Aparece como recuadro flotante</a:t>
+              <a:t>• Selector de mes 📅 para cambiar de mes</a:t>
+            </a:r>
+          </a:p>
+          <a:p>
+            <a:pPr>
+              <a:spcAft>
+                <a:spcPts val="800"/>
+              </a:spcAft>
+              <a:defRPr sz="1400">
+                <a:solidFill>
+                  <a:srgbClr val="E5E7EB"/>
+                </a:solidFill>
+              </a:defRPr>
+            </a:pPr>
+            <a:r>
+              <a:t>• "✖ Volver al modo normal" para salir</a:t>
             </a:r>
           </a:p>
         </p:txBody>
@@ -9992,12 +10711,92 @@
         </p:nvSpPr>
         <p:spPr>
           <a:xfrm>
-            <a:off x="6400800" y="1645920"/>
-            <a:ext cx="3200400" cy="2926080"/>
+            <a:off x="6583680" y="1645920"/>
+            <a:ext cx="4937760" cy="4206240"/>
           </a:xfrm>
           <a:prstGeom prst="roundRect">
             <a:avLst>
               <a:gd name="adj" fmla="val 4000"/>
+            </a:avLst>
+          </a:prstGeom>
+          <a:solidFill>
+            <a:srgbClr val="1A233B"/>
+          </a:solidFill>
+          <a:ln>
+            <a:noFill/>
+          </a:ln>
+        </p:spPr>
+        <p:style>
+          <a:lnRef idx="1">
+            <a:schemeClr val="accent1"/>
+          </a:lnRef>
+          <a:fillRef idx="3">
+            <a:schemeClr val="accent1"/>
+          </a:fillRef>
+          <a:effectRef idx="2">
+            <a:schemeClr val="accent1"/>
+          </a:effectRef>
+          <a:fontRef idx="minor">
+            <a:schemeClr val="lt1"/>
+          </a:fontRef>
+        </p:style>
+        <p:txBody>
+          <a:bodyPr rtlCol="0" anchor="ctr"/>
+          <a:lstStyle/>
+          <a:p>
+            <a:pPr algn="ctr"/>
+          </a:p>
+        </p:txBody>
+      </p:sp>
+      <p:sp>
+        <p:nvSpPr>
+          <p:cNvPr id="8" name="TextBox 7"/>
+          <p:cNvSpPr txBox="1"/>
+          <p:nvPr/>
+        </p:nvSpPr>
+        <p:spPr>
+          <a:xfrm>
+            <a:off x="6766560" y="1737360"/>
+            <a:ext cx="4572000" cy="365760"/>
+          </a:xfrm>
+          <a:prstGeom prst="rect">
+            <a:avLst/>
+          </a:prstGeom>
+          <a:noFill/>
+        </p:spPr>
+        <p:txBody>
+          <a:bodyPr wrap="square">
+            <a:spAutoFit/>
+          </a:bodyPr>
+          <a:lstStyle/>
+          <a:p>
+            <a:pPr algn="l">
+              <a:defRPr sz="1400" b="1">
+                <a:solidFill>
+                  <a:srgbClr val="FFFFFF"/>
+                </a:solidFill>
+              </a:defRPr>
+            </a:pPr>
+            <a:r>
+              <a:t>🌍 Colombia</a:t>
+            </a:r>
+          </a:p>
+        </p:txBody>
+      </p:sp>
+      <p:sp>
+        <p:nvSpPr>
+          <p:cNvPr id="9" name="Rounded Rectangle 8"/>
+          <p:cNvSpPr/>
+          <p:nvPr/>
+        </p:nvSpPr>
+        <p:spPr>
+          <a:xfrm>
+            <a:off x="6949440" y="2194560"/>
+            <a:ext cx="4206240" cy="502920"/>
+          </a:xfrm>
+          <a:prstGeom prst="roundRect">
+            <a:avLst>
+              <a:gd name="adj" fmla="val 3000"/>
             </a:avLst>
           </a:prstGeom>
           <a:solidFill>
@@ -10031,14 +10830,14 @@
       </p:sp>
       <p:sp>
         <p:nvSpPr>
-          <p:cNvPr id="8" name="TextBox 7"/>
-          <p:cNvSpPr txBox="1"/>
-          <p:nvPr/>
-        </p:nvSpPr>
-        <p:spPr>
-          <a:xfrm>
-            <a:off x="5943600" y="2560320"/>
-            <a:ext cx="457200" cy="457200"/>
+          <p:cNvPr id="10" name="TextBox 9"/>
+          <p:cNvSpPr txBox="1"/>
+          <p:nvPr/>
+        </p:nvSpPr>
+        <p:spPr>
+          <a:xfrm>
+            <a:off x="7132320" y="2286000"/>
+            <a:ext cx="3840480" cy="320040"/>
           </a:xfrm>
           <a:prstGeom prst="rect">
             <a:avLst/>
@@ -10052,34 +10851,71 @@
           <a:lstStyle/>
           <a:p>
             <a:pPr algn="l">
-              <a:defRPr sz="2000" b="0">
-                <a:solidFill>
-                  <a:srgbClr val="232D4A"/>
-                </a:solidFill>
-              </a:defRPr>
-            </a:pPr>
-            <a:r>
-              <a:t>▶</a:t>
-            </a:r>
-          </a:p>
-        </p:txBody>
-      </p:sp>
-      <p:sp>
-        <p:nvSpPr>
-          <p:cNvPr id="9" name="Oval 8"/>
+              <a:defRPr sz="1200" b="0">
+                <a:solidFill>
+                  <a:srgbClr val="10B981"/>
+                </a:solidFill>
+              </a:defRPr>
+            </a:pPr>
+            <a:r>
+              <a:t>☑ Bogotá   ☑ Chía</a:t>
+            </a:r>
+          </a:p>
+        </p:txBody>
+      </p:sp>
+      <p:sp>
+        <p:nvSpPr>
+          <p:cNvPr id="11" name="TextBox 10"/>
+          <p:cNvSpPr txBox="1"/>
+          <p:nvPr/>
+        </p:nvSpPr>
+        <p:spPr>
+          <a:xfrm>
+            <a:off x="6766560" y="2880360"/>
+            <a:ext cx="4572000" cy="320040"/>
+          </a:xfrm>
+          <a:prstGeom prst="rect">
+            <a:avLst/>
+          </a:prstGeom>
+          <a:noFill/>
+        </p:spPr>
+        <p:txBody>
+          <a:bodyPr wrap="square">
+            <a:spAutoFit/>
+          </a:bodyPr>
+          <a:lstStyle/>
+          <a:p>
+            <a:pPr algn="l">
+              <a:defRPr sz="1100" b="1">
+                <a:solidFill>
+                  <a:srgbClr val="F59E0B"/>
+                </a:solidFill>
+              </a:defRPr>
+            </a:pPr>
+            <a:r>
+              <a:t>🛡️ Guardias</a:t>
+            </a:r>
+          </a:p>
+        </p:txBody>
+      </p:sp>
+      <p:sp>
+        <p:nvSpPr>
+          <p:cNvPr id="12" name="Rounded Rectangle 11"/>
           <p:cNvSpPr/>
           <p:nvPr/>
         </p:nvSpPr>
         <p:spPr>
           <a:xfrm>
-            <a:off x="7132320" y="1828800"/>
-            <a:ext cx="914400" cy="914400"/>
-          </a:xfrm>
-          <a:prstGeom prst="ellipse">
-            <a:avLst/>
+            <a:off x="6949440" y="3200400"/>
+            <a:ext cx="4206240" cy="822960"/>
+          </a:xfrm>
+          <a:prstGeom prst="roundRect">
+            <a:avLst>
+              <a:gd name="adj" fmla="val 3000"/>
+            </a:avLst>
           </a:prstGeom>
           <a:solidFill>
-            <a:srgbClr val="10B981"/>
+            <a:srgbClr val="232D4A"/>
           </a:solidFill>
           <a:ln>
             <a:noFill/>
@@ -10109,175 +10945,220 @@
       </p:sp>
       <p:sp>
         <p:nvSpPr>
-          <p:cNvPr id="10" name="TextBox 9"/>
-          <p:cNvSpPr txBox="1"/>
-          <p:nvPr/>
-        </p:nvSpPr>
-        <p:spPr>
-          <a:xfrm>
-            <a:off x="7132320" y="1965960"/>
-            <a:ext cx="914400" cy="640080"/>
-          </a:xfrm>
-          <a:prstGeom prst="rect">
-            <a:avLst/>
-          </a:prstGeom>
-          <a:noFill/>
-        </p:spPr>
-        <p:txBody>
-          <a:bodyPr wrap="square">
-            <a:spAutoFit/>
-          </a:bodyPr>
-          <a:lstStyle/>
-          <a:p>
-            <a:pPr algn="ctr">
-              <a:defRPr sz="1800" b="1">
+          <p:cNvPr id="13" name="TextBox 12"/>
+          <p:cNvSpPr txBox="1"/>
+          <p:nvPr/>
+        </p:nvSpPr>
+        <p:spPr>
+          <a:xfrm>
+            <a:off x="7132320" y="3291840"/>
+            <a:ext cx="3840480" cy="274320"/>
+          </a:xfrm>
+          <a:prstGeom prst="rect">
+            <a:avLst/>
+          </a:prstGeom>
+          <a:noFill/>
+        </p:spPr>
+        <p:txBody>
+          <a:bodyPr wrap="square">
+            <a:spAutoFit/>
+          </a:bodyPr>
+          <a:lstStyle/>
+          <a:p>
+            <a:pPr algn="l">
+              <a:defRPr sz="1100" b="1">
                 <a:solidFill>
                   <a:srgbClr val="FFFFFF"/>
                 </a:solidFill>
               </a:defRPr>
             </a:pPr>
             <a:r>
-              <a:t>JV</a:t>
-            </a:r>
-          </a:p>
-        </p:txBody>
-      </p:sp>
-      <p:sp>
-        <p:nvSpPr>
-          <p:cNvPr id="11" name="TextBox 10"/>
-          <p:cNvSpPr txBox="1"/>
-          <p:nvPr/>
-        </p:nvSpPr>
-        <p:spPr>
-          <a:xfrm>
-            <a:off x="6675120" y="2834640"/>
-            <a:ext cx="2651760" cy="365760"/>
-          </a:xfrm>
-          <a:prstGeom prst="rect">
-            <a:avLst/>
-          </a:prstGeom>
-          <a:noFill/>
-        </p:spPr>
-        <p:txBody>
-          <a:bodyPr wrap="square">
-            <a:spAutoFit/>
-          </a:bodyPr>
-          <a:lstStyle/>
-          <a:p>
-            <a:pPr algn="ctr">
-              <a:defRPr sz="1600" b="1">
-                <a:solidFill>
-                  <a:srgbClr val="FFFFFF"/>
-                </a:solidFill>
-              </a:defRPr>
-            </a:pPr>
-            <a:r>
-              <a:t>Julian Garzon</a:t>
-            </a:r>
-          </a:p>
-        </p:txBody>
-      </p:sp>
-      <p:sp>
-        <p:nvSpPr>
-          <p:cNvPr id="12" name="TextBox 11"/>
-          <p:cNvSpPr txBox="1"/>
-          <p:nvPr/>
-        </p:nvSpPr>
-        <p:spPr>
-          <a:xfrm>
-            <a:off x="6675120" y="3200400"/>
-            <a:ext cx="2651760" cy="274320"/>
-          </a:xfrm>
-          <a:prstGeom prst="rect">
-            <a:avLst/>
-          </a:prstGeom>
-          <a:noFill/>
-        </p:spPr>
-        <p:txBody>
-          <a:bodyPr wrap="square">
-            <a:spAutoFit/>
-          </a:bodyPr>
-          <a:lstStyle/>
-          <a:p>
-            <a:pPr algn="ctr">
-              <a:defRPr sz="1200" b="0">
+              <a:t>🛡️ Angel Ortiz — Mié 2</a:t>
+            </a:r>
+          </a:p>
+        </p:txBody>
+      </p:sp>
+      <p:sp>
+        <p:nvSpPr>
+          <p:cNvPr id="14" name="TextBox 13"/>
+          <p:cNvSpPr txBox="1"/>
+          <p:nvPr/>
+        </p:nvSpPr>
+        <p:spPr>
+          <a:xfrm>
+            <a:off x="7132320" y="3566160"/>
+            <a:ext cx="3840480" cy="274320"/>
+          </a:xfrm>
+          <a:prstGeom prst="rect">
+            <a:avLst/>
+          </a:prstGeom>
+          <a:noFill/>
+        </p:spPr>
+        <p:txBody>
+          <a:bodyPr wrap="square">
+            <a:spAutoFit/>
+          </a:bodyPr>
+          <a:lstStyle/>
+          <a:p>
+            <a:pPr algn="l">
+              <a:defRPr sz="1000" b="0">
+                <a:solidFill>
+                  <a:srgbClr val="9CA3AF"/>
+                </a:solidFill>
+              </a:defRPr>
+            </a:pPr>
+            <a:r>
+              <a:t>🏪 Zona Calle 82  •  🏙️ Bogotá  •  🇨🇴</a:t>
+            </a:r>
+          </a:p>
+        </p:txBody>
+      </p:sp>
+      <p:sp>
+        <p:nvSpPr>
+          <p:cNvPr id="15" name="TextBox 14"/>
+          <p:cNvSpPr txBox="1"/>
+          <p:nvPr/>
+        </p:nvSpPr>
+        <p:spPr>
+          <a:xfrm>
+            <a:off x="6766560" y="4023360"/>
+            <a:ext cx="4572000" cy="320040"/>
+          </a:xfrm>
+          <a:prstGeom prst="rect">
+            <a:avLst/>
+          </a:prstGeom>
+          <a:noFill/>
+        </p:spPr>
+        <p:txBody>
+          <a:bodyPr wrap="square">
+            <a:spAutoFit/>
+          </a:bodyPr>
+          <a:lstStyle/>
+          <a:p>
+            <a:pPr algn="l">
+              <a:defRPr sz="1100" b="1">
+                <a:solidFill>
+                  <a:srgbClr val="3B82F6"/>
+                </a:solidFill>
+              </a:defRPr>
+            </a:pPr>
+            <a:r>
+              <a:t>📅 Calendarios</a:t>
+            </a:r>
+          </a:p>
+        </p:txBody>
+      </p:sp>
+      <p:sp>
+        <p:nvSpPr>
+          <p:cNvPr id="16" name="Rounded Rectangle 15"/>
+          <p:cNvSpPr/>
+          <p:nvPr/>
+        </p:nvSpPr>
+        <p:spPr>
+          <a:xfrm>
+            <a:off x="6766560" y="4389120"/>
+            <a:ext cx="4480560" cy="685800"/>
+          </a:xfrm>
+          <a:prstGeom prst="roundRect">
+            <a:avLst>
+              <a:gd name="adj" fmla="val 3000"/>
+            </a:avLst>
+          </a:prstGeom>
+          <a:solidFill>
+            <a:srgbClr val="161F38"/>
+          </a:solidFill>
+          <a:ln>
+            <a:noFill/>
+          </a:ln>
+        </p:spPr>
+        <p:style>
+          <a:lnRef idx="1">
+            <a:schemeClr val="accent1"/>
+          </a:lnRef>
+          <a:fillRef idx="3">
+            <a:schemeClr val="accent1"/>
+          </a:fillRef>
+          <a:effectRef idx="2">
+            <a:schemeClr val="accent1"/>
+          </a:effectRef>
+          <a:fontRef idx="minor">
+            <a:schemeClr val="lt1"/>
+          </a:fontRef>
+        </p:style>
+        <p:txBody>
+          <a:bodyPr rtlCol="0" anchor="ctr"/>
+          <a:lstStyle/>
+          <a:p>
+            <a:pPr algn="ctr"/>
+          </a:p>
+        </p:txBody>
+      </p:sp>
+      <p:sp>
+        <p:nvSpPr>
+          <p:cNvPr id="17" name="TextBox 16"/>
+          <p:cNvSpPr txBox="1"/>
+          <p:nvPr/>
+        </p:nvSpPr>
+        <p:spPr>
+          <a:xfrm>
+            <a:off x="6949440" y="4480560"/>
+            <a:ext cx="4114800" cy="274320"/>
+          </a:xfrm>
+          <a:prstGeom prst="rect">
+            <a:avLst/>
+          </a:prstGeom>
+          <a:noFill/>
+        </p:spPr>
+        <p:txBody>
+          <a:bodyPr wrap="square">
+            <a:spAutoFit/>
+          </a:bodyPr>
+          <a:lstStyle/>
+          <a:p>
+            <a:pPr algn="l">
+              <a:defRPr sz="1100" b="1">
+                <a:solidFill>
+                  <a:srgbClr val="3B82F6"/>
+                </a:solidFill>
+              </a:defRPr>
+            </a:pPr>
+            <a:r>
+              <a:t>🏪 Zona Calle 82</a:t>
+            </a:r>
+          </a:p>
+        </p:txBody>
+      </p:sp>
+      <p:sp>
+        <p:nvSpPr>
+          <p:cNvPr id="18" name="TextBox 17"/>
+          <p:cNvSpPr txBox="1"/>
+          <p:nvPr/>
+        </p:nvSpPr>
+        <p:spPr>
+          <a:xfrm>
+            <a:off x="6949440" y="4754880"/>
+            <a:ext cx="4114800" cy="274320"/>
+          </a:xfrm>
+          <a:prstGeom prst="rect">
+            <a:avLst/>
+          </a:prstGeom>
+          <a:noFill/>
+        </p:spPr>
+        <p:txBody>
+          <a:bodyPr wrap="square">
+            <a:spAutoFit/>
+          </a:bodyPr>
+          <a:lstStyle/>
+          <a:p>
+            <a:pPr algn="l">
+              <a:defRPr sz="1000" b="0">
                 <a:solidFill>
                   <a:srgbClr val="E5E7EB"/>
                 </a:solidFill>
               </a:defRPr>
             </a:pPr>
             <a:r>
-              <a:t>📧 julian@empresa.com</a:t>
-            </a:r>
-          </a:p>
-        </p:txBody>
-      </p:sp>
-      <p:sp>
-        <p:nvSpPr>
-          <p:cNvPr id="13" name="TextBox 12"/>
-          <p:cNvSpPr txBox="1"/>
-          <p:nvPr/>
-        </p:nvSpPr>
-        <p:spPr>
-          <a:xfrm>
-            <a:off x="6675120" y="3474720"/>
-            <a:ext cx="2651760" cy="274320"/>
-          </a:xfrm>
-          <a:prstGeom prst="rect">
-            <a:avLst/>
-          </a:prstGeom>
-          <a:noFill/>
-        </p:spPr>
-        <p:txBody>
-          <a:bodyPr wrap="square">
-            <a:spAutoFit/>
-          </a:bodyPr>
-          <a:lstStyle/>
-          <a:p>
-            <a:pPr algn="ctr">
-              <a:defRPr sz="1200" b="0">
-                <a:solidFill>
-                  <a:srgbClr val="E5E7EB"/>
-                </a:solidFill>
-              </a:defRPr>
-            </a:pPr>
-            <a:r>
-              <a:t>📱 300 7654321</a:t>
-            </a:r>
-          </a:p>
-        </p:txBody>
-      </p:sp>
-      <p:sp>
-        <p:nvSpPr>
-          <p:cNvPr id="14" name="TextBox 13"/>
-          <p:cNvSpPr txBox="1"/>
-          <p:nvPr/>
-        </p:nvSpPr>
-        <p:spPr>
-          <a:xfrm>
-            <a:off x="6675120" y="3749039"/>
-            <a:ext cx="2651760" cy="274320"/>
-          </a:xfrm>
-          <a:prstGeom prst="rect">
-            <a:avLst/>
-          </a:prstGeom>
-          <a:noFill/>
-        </p:spPr>
-        <p:txBody>
-          <a:bodyPr wrap="square">
-            <a:spAutoFit/>
-          </a:bodyPr>
-          <a:lstStyle/>
-          <a:p>
-            <a:pPr algn="ctr">
-              <a:defRPr sz="1200" b="0">
-                <a:solidFill>
-                  <a:srgbClr val="E5E7EB"/>
-                </a:solidFill>
-              </a:defRPr>
-            </a:pPr>
-            <a:r>
-              <a:t>🏪 C.C Felicidad</a:t>
+              <a:t>Semana 1:  L1 M2 O3 J4 V5 S6 D7  …</a:t>
             </a:r>
           </a:p>
         </p:txBody>
@@ -10323,7 +11204,7 @@
             <a:avLst/>
           </a:prstGeom>
           <a:solidFill>
-            <a:srgbClr val="3B82F6"/>
+            <a:srgbClr val="10B981"/>
           </a:solidFill>
           <a:ln>
             <a:noFill/>
@@ -10381,7 +11262,7 @@
               </a:defRPr>
             </a:pPr>
             <a:r>
-              <a:t>Edición de Datos</a:t>
+              <a:t>Tooltip: Info del Técnico</a:t>
             </a:r>
           </a:p>
         </p:txBody>
@@ -10401,7 +11282,7 @@
             <a:avLst/>
           </a:prstGeom>
           <a:solidFill>
-            <a:srgbClr val="3B82F6"/>
+            <a:srgbClr val="10B981"/>
           </a:solidFill>
           <a:ln>
             <a:noFill/>
@@ -10431,46 +11312,36 @@
       </p:sp>
       <p:sp>
         <p:nvSpPr>
-          <p:cNvPr id="5" name="Rounded Rectangle 4"/>
-          <p:cNvSpPr/>
+          <p:cNvPr id="5" name="TextBox 4"/>
+          <p:cNvSpPr txBox="1"/>
           <p:nvPr/>
         </p:nvSpPr>
         <p:spPr>
           <a:xfrm>
             <a:off x="731520" y="1645920"/>
-            <a:ext cx="5029200" cy="2286000"/>
-          </a:xfrm>
-          <a:prstGeom prst="roundRect">
-            <a:avLst>
-              <a:gd name="adj" fmla="val 4000"/>
-            </a:avLst>
-          </a:prstGeom>
-          <a:solidFill>
-            <a:srgbClr val="1A233B"/>
-          </a:solidFill>
-          <a:ln>
-            <a:noFill/>
-          </a:ln>
-        </p:spPr>
-        <p:style>
-          <a:lnRef idx="1">
-            <a:schemeClr val="accent1"/>
-          </a:lnRef>
-          <a:fillRef idx="3">
-            <a:schemeClr val="accent1"/>
-          </a:fillRef>
-          <a:effectRef idx="2">
-            <a:schemeClr val="accent1"/>
-          </a:effectRef>
-          <a:fontRef idx="minor">
-            <a:schemeClr val="lt1"/>
-          </a:fontRef>
-        </p:style>
-        <p:txBody>
-          <a:bodyPr rtlCol="0" anchor="ctr"/>
-          <a:lstStyle/>
-          <a:p>
-            <a:pPr algn="ctr"/>
+            <a:ext cx="5029200" cy="457200"/>
+          </a:xfrm>
+          <a:prstGeom prst="rect">
+            <a:avLst/>
+          </a:prstGeom>
+          <a:noFill/>
+        </p:spPr>
+        <p:txBody>
+          <a:bodyPr wrap="square">
+            <a:spAutoFit/>
+          </a:bodyPr>
+          <a:lstStyle/>
+          <a:p>
+            <a:pPr algn="l">
+              <a:defRPr sz="2000" b="1">
+                <a:solidFill>
+                  <a:srgbClr val="10B981"/>
+                </a:solidFill>
+              </a:defRPr>
+            </a:pPr>
+            <a:r>
+              <a:t>Pasa el cursor sobre cualquier turno</a:t>
+            </a:r>
           </a:p>
         </p:txBody>
       </p:sp>
@@ -10482,43 +11353,8 @@
         </p:nvSpPr>
         <p:spPr>
           <a:xfrm>
-            <a:off x="914400" y="1737360"/>
-            <a:ext cx="4663440" cy="365760"/>
-          </a:xfrm>
-          <a:prstGeom prst="rect">
-            <a:avLst/>
-          </a:prstGeom>
-          <a:noFill/>
-        </p:spPr>
-        <p:txBody>
-          <a:bodyPr wrap="square">
-            <a:spAutoFit/>
-          </a:bodyPr>
-          <a:lstStyle/>
-          <a:p>
-            <a:pPr algn="l">
-              <a:defRPr sz="1600" b="1">
-                <a:solidFill>
-                  <a:srgbClr val="3B82F6"/>
-                </a:solidFill>
-              </a:defRPr>
-            </a:pPr>
-            <a:r>
-              <a:t>personas.json</a:t>
-            </a:r>
-          </a:p>
-        </p:txBody>
-      </p:sp>
-      <p:sp>
-        <p:nvSpPr>
-          <p:cNvPr id="7" name="TextBox 6"/>
-          <p:cNvSpPr txBox="1"/>
-          <p:nvPr/>
-        </p:nvSpPr>
-        <p:spPr>
-          <a:xfrm>
-            <a:off x="914400" y="2148840"/>
-            <a:ext cx="4663440" cy="1645920"/>
+            <a:off x="731520" y="2286000"/>
+            <a:ext cx="5029200" cy="1828800"/>
           </a:xfrm>
           <a:prstGeom prst="rect">
             <a:avLst/>
@@ -10535,14 +11371,14 @@
               <a:spcAft>
                 <a:spcPts val="800"/>
               </a:spcAft>
-              <a:defRPr sz="1300">
+              <a:defRPr sz="1500">
                 <a:solidFill>
                   <a:srgbClr val="E5E7EB"/>
                 </a:solidFill>
               </a:defRPr>
             </a:pPr>
             <a:r>
-              <a:t>• id: identificador único</a:t>
+              <a:t>• Foto grande del técnico</a:t>
             </a:r>
           </a:p>
           <a:p>
@@ -10550,14 +11386,14 @@
               <a:spcAft>
                 <a:spcPts val="800"/>
               </a:spcAft>
-              <a:defRPr sz="1300">
+              <a:defRPr sz="1500">
                 <a:solidFill>
                   <a:srgbClr val="E5E7EB"/>
                 </a:solidFill>
               </a:defRPr>
             </a:pPr>
             <a:r>
-              <a:t>• name: nombre completo</a:t>
+              <a:t>• Nombre completo</a:t>
             </a:r>
           </a:p>
           <a:p>
@@ -10565,14 +11401,14 @@
               <a:spcAft>
                 <a:spcPts val="800"/>
               </a:spcAft>
-              <a:defRPr sz="1300">
+              <a:defRPr sz="1500">
                 <a:solidFill>
                   <a:srgbClr val="E5E7EB"/>
                 </a:solidFill>
               </a:defRPr>
             </a:pPr>
             <a:r>
-              <a:t>• email: correo electrónico</a:t>
+              <a:t>• Correo electrónico</a:t>
             </a:r>
           </a:p>
           <a:p>
@@ -10580,14 +11416,14 @@
               <a:spcAft>
                 <a:spcPts val="800"/>
               </a:spcAft>
-              <a:defRPr sz="1300">
+              <a:defRPr sz="1500">
                 <a:solidFill>
                   <a:srgbClr val="E5E7EB"/>
                 </a:solidFill>
               </a:defRPr>
             </a:pPr>
             <a:r>
-              <a:t>• phone: teléfono</a:t>
+              <a:t>• Teléfono de contacto</a:t>
             </a:r>
           </a:p>
           <a:p>
@@ -10595,225 +11431,47 @@
               <a:spcAft>
                 <a:spcPts val="800"/>
               </a:spcAft>
-              <a:defRPr sz="1300">
+              <a:defRPr sz="1500">
                 <a:solidFill>
                   <a:srgbClr val="E5E7EB"/>
                 </a:solidFill>
               </a:defRPr>
             </a:pPr>
             <a:r>
-              <a:t>• photo: ruta de la foto (opcional)</a:t>
-            </a:r>
-          </a:p>
-        </p:txBody>
-      </p:sp>
-      <p:sp>
-        <p:nvSpPr>
-          <p:cNvPr id="8" name="Rounded Rectangle 7"/>
-          <p:cNvSpPr/>
-          <p:nvPr/>
-        </p:nvSpPr>
-        <p:spPr>
-          <a:xfrm>
-            <a:off x="6400800" y="1645920"/>
-            <a:ext cx="5029200" cy="2286000"/>
-          </a:xfrm>
-          <a:prstGeom prst="roundRect">
-            <a:avLst>
-              <a:gd name="adj" fmla="val 4000"/>
-            </a:avLst>
-          </a:prstGeom>
-          <a:solidFill>
-            <a:srgbClr val="1A233B"/>
-          </a:solidFill>
-          <a:ln>
-            <a:noFill/>
-          </a:ln>
-        </p:spPr>
-        <p:style>
-          <a:lnRef idx="1">
-            <a:schemeClr val="accent1"/>
-          </a:lnRef>
-          <a:fillRef idx="3">
-            <a:schemeClr val="accent1"/>
-          </a:fillRef>
-          <a:effectRef idx="2">
-            <a:schemeClr val="accent1"/>
-          </a:effectRef>
-          <a:fontRef idx="minor">
-            <a:schemeClr val="lt1"/>
-          </a:fontRef>
-        </p:style>
-        <p:txBody>
-          <a:bodyPr rtlCol="0" anchor="ctr"/>
-          <a:lstStyle/>
-          <a:p>
-            <a:pPr algn="ctr"/>
-          </a:p>
-        </p:txBody>
-      </p:sp>
-      <p:sp>
-        <p:nvSpPr>
-          <p:cNvPr id="9" name="TextBox 8"/>
-          <p:cNvSpPr txBox="1"/>
-          <p:nvPr/>
-        </p:nvSpPr>
-        <p:spPr>
-          <a:xfrm>
-            <a:off x="6583680" y="1737360"/>
-            <a:ext cx="4663440" cy="365760"/>
-          </a:xfrm>
-          <a:prstGeom prst="rect">
-            <a:avLst/>
-          </a:prstGeom>
-          <a:noFill/>
-        </p:spPr>
-        <p:txBody>
-          <a:bodyPr wrap="square">
-            <a:spAutoFit/>
-          </a:bodyPr>
-          <a:lstStyle/>
-          <a:p>
-            <a:pPr algn="l">
-              <a:defRPr sz="1600" b="1">
-                <a:solidFill>
-                  <a:srgbClr val="F59E0B"/>
-                </a:solidFill>
-              </a:defRPr>
-            </a:pPr>
-            <a:r>
-              <a:t>horarios.json</a:t>
-            </a:r>
-          </a:p>
-        </p:txBody>
-      </p:sp>
-      <p:sp>
-        <p:nvSpPr>
-          <p:cNvPr id="10" name="TextBox 9"/>
-          <p:cNvSpPr txBox="1"/>
-          <p:nvPr/>
-        </p:nvSpPr>
-        <p:spPr>
-          <a:xfrm>
-            <a:off x="6583680" y="2148840"/>
-            <a:ext cx="4663440" cy="1645920"/>
-          </a:xfrm>
-          <a:prstGeom prst="rect">
-            <a:avLst/>
-          </a:prstGeom>
-          <a:noFill/>
-        </p:spPr>
-        <p:txBody>
-          <a:bodyPr wrap="square">
-            <a:spAutoFit/>
-          </a:bodyPr>
-          <a:lstStyle/>
+              <a:t>• Tienda asignada</a:t>
+            </a:r>
+          </a:p>
           <a:p>
             <a:pPr>
               <a:spcAft>
                 <a:spcPts val="800"/>
               </a:spcAft>
-              <a:defRPr sz="1300">
+              <a:defRPr sz="1500">
                 <a:solidFill>
                   <a:srgbClr val="E5E7EB"/>
                 </a:solidFill>
               </a:defRPr>
             </a:pPr>
             <a:r>
-              <a:t>• personaId: referencia a personas.json</a:t>
-            </a:r>
-          </a:p>
-          <a:p>
-            <a:pPr>
-              <a:spcAft>
-                <a:spcPts val="800"/>
-              </a:spcAft>
-              <a:defRPr sz="1300">
-                <a:solidFill>
-                  <a:srgbClr val="E5E7EB"/>
-                </a:solidFill>
-              </a:defRPr>
-            </a:pPr>
-            <a:r>
-              <a:t>• month: mes en español</a:t>
-            </a:r>
-          </a:p>
-          <a:p>
-            <a:pPr>
-              <a:spcAft>
-                <a:spcPts val="800"/>
-              </a:spcAft>
-              <a:defRPr sz="1300">
-                <a:solidFill>
-                  <a:srgbClr val="E5E7EB"/>
-                </a:solidFill>
-              </a:defRPr>
-            </a:pPr>
-            <a:r>
-              <a:t>• week: Semana 1 a Semana 5</a:t>
-            </a:r>
-          </a:p>
-          <a:p>
-            <a:pPr>
-              <a:spcAft>
-                <a:spcPts val="800"/>
-              </a:spcAft>
-              <a:defRPr sz="1300">
-                <a:solidFill>
-                  <a:srgbClr val="E5E7EB"/>
-                </a:solidFill>
-              </a:defRPr>
-            </a:pPr>
-            <a:r>
-              <a:t>• day: día de la semana</a:t>
-            </a:r>
-          </a:p>
-          <a:p>
-            <a:pPr>
-              <a:spcAft>
-                <a:spcPts val="800"/>
-              </a:spcAft>
-              <a:defRPr sz="1300">
-                <a:solidFill>
-                  <a:srgbClr val="E5E7EB"/>
-                </a:solidFill>
-              </a:defRPr>
-            </a:pPr>
-            <a:r>
-              <a:t>• start/end: horario (type normal)</a:t>
-            </a:r>
-          </a:p>
-          <a:p>
-            <a:pPr>
-              <a:spcAft>
-                <a:spcPts val="800"/>
-              </a:spcAft>
-              <a:defRPr sz="1300">
-                <a:solidFill>
-                  <a:srgbClr val="E5E7EB"/>
-                </a:solidFill>
-              </a:defRPr>
-            </a:pPr>
-            <a:r>
-              <a:t>• type: "normal" o "guardia"</a:t>
-            </a:r>
-          </a:p>
-        </p:txBody>
-      </p:sp>
-      <p:sp>
-        <p:nvSpPr>
-          <p:cNvPr id="11" name="Rounded Rectangle 10"/>
+              <a:t>• Aparece como recuadro flotante</a:t>
+            </a:r>
+          </a:p>
+        </p:txBody>
+      </p:sp>
+      <p:sp>
+        <p:nvSpPr>
+          <p:cNvPr id="7" name="Rounded Rectangle 6"/>
           <p:cNvSpPr/>
           <p:nvPr/>
         </p:nvSpPr>
         <p:spPr>
           <a:xfrm>
-            <a:off x="731520" y="4206240"/>
-            <a:ext cx="10698480" cy="640080"/>
+            <a:off x="6400800" y="1645920"/>
+            <a:ext cx="3200400" cy="2926080"/>
           </a:xfrm>
           <a:prstGeom prst="roundRect">
             <a:avLst>
-              <a:gd name="adj" fmla="val 3000"/>
+              <a:gd name="adj" fmla="val 4000"/>
             </a:avLst>
           </a:prstGeom>
           <a:solidFill>
@@ -10847,14 +11505,162 @@
       </p:sp>
       <p:sp>
         <p:nvSpPr>
+          <p:cNvPr id="8" name="TextBox 7"/>
+          <p:cNvSpPr txBox="1"/>
+          <p:nvPr/>
+        </p:nvSpPr>
+        <p:spPr>
+          <a:xfrm>
+            <a:off x="5943600" y="2560320"/>
+            <a:ext cx="457200" cy="457200"/>
+          </a:xfrm>
+          <a:prstGeom prst="rect">
+            <a:avLst/>
+          </a:prstGeom>
+          <a:noFill/>
+        </p:spPr>
+        <p:txBody>
+          <a:bodyPr wrap="square">
+            <a:spAutoFit/>
+          </a:bodyPr>
+          <a:lstStyle/>
+          <a:p>
+            <a:pPr algn="l">
+              <a:defRPr sz="2000" b="0">
+                <a:solidFill>
+                  <a:srgbClr val="232D4A"/>
+                </a:solidFill>
+              </a:defRPr>
+            </a:pPr>
+            <a:r>
+              <a:t>▶</a:t>
+            </a:r>
+          </a:p>
+        </p:txBody>
+      </p:sp>
+      <p:sp>
+        <p:nvSpPr>
+          <p:cNvPr id="9" name="Oval 8"/>
+          <p:cNvSpPr/>
+          <p:nvPr/>
+        </p:nvSpPr>
+        <p:spPr>
+          <a:xfrm>
+            <a:off x="7132320" y="1828800"/>
+            <a:ext cx="914400" cy="914400"/>
+          </a:xfrm>
+          <a:prstGeom prst="ellipse">
+            <a:avLst/>
+          </a:prstGeom>
+          <a:solidFill>
+            <a:srgbClr val="10B981"/>
+          </a:solidFill>
+          <a:ln>
+            <a:noFill/>
+          </a:ln>
+        </p:spPr>
+        <p:style>
+          <a:lnRef idx="1">
+            <a:schemeClr val="accent1"/>
+          </a:lnRef>
+          <a:fillRef idx="3">
+            <a:schemeClr val="accent1"/>
+          </a:fillRef>
+          <a:effectRef idx="2">
+            <a:schemeClr val="accent1"/>
+          </a:effectRef>
+          <a:fontRef idx="minor">
+            <a:schemeClr val="lt1"/>
+          </a:fontRef>
+        </p:style>
+        <p:txBody>
+          <a:bodyPr rtlCol="0" anchor="ctr"/>
+          <a:lstStyle/>
+          <a:p>
+            <a:pPr algn="ctr"/>
+          </a:p>
+        </p:txBody>
+      </p:sp>
+      <p:sp>
+        <p:nvSpPr>
+          <p:cNvPr id="10" name="TextBox 9"/>
+          <p:cNvSpPr txBox="1"/>
+          <p:nvPr/>
+        </p:nvSpPr>
+        <p:spPr>
+          <a:xfrm>
+            <a:off x="7132320" y="1965960"/>
+            <a:ext cx="914400" cy="640080"/>
+          </a:xfrm>
+          <a:prstGeom prst="rect">
+            <a:avLst/>
+          </a:prstGeom>
+          <a:noFill/>
+        </p:spPr>
+        <p:txBody>
+          <a:bodyPr wrap="square">
+            <a:spAutoFit/>
+          </a:bodyPr>
+          <a:lstStyle/>
+          <a:p>
+            <a:pPr algn="ctr">
+              <a:defRPr sz="1800" b="1">
+                <a:solidFill>
+                  <a:srgbClr val="FFFFFF"/>
+                </a:solidFill>
+              </a:defRPr>
+            </a:pPr>
+            <a:r>
+              <a:t>JV</a:t>
+            </a:r>
+          </a:p>
+        </p:txBody>
+      </p:sp>
+      <p:sp>
+        <p:nvSpPr>
+          <p:cNvPr id="11" name="TextBox 10"/>
+          <p:cNvSpPr txBox="1"/>
+          <p:nvPr/>
+        </p:nvSpPr>
+        <p:spPr>
+          <a:xfrm>
+            <a:off x="6675120" y="2834640"/>
+            <a:ext cx="2651760" cy="365760"/>
+          </a:xfrm>
+          <a:prstGeom prst="rect">
+            <a:avLst/>
+          </a:prstGeom>
+          <a:noFill/>
+        </p:spPr>
+        <p:txBody>
+          <a:bodyPr wrap="square">
+            <a:spAutoFit/>
+          </a:bodyPr>
+          <a:lstStyle/>
+          <a:p>
+            <a:pPr algn="ctr">
+              <a:defRPr sz="1600" b="1">
+                <a:solidFill>
+                  <a:srgbClr val="FFFFFF"/>
+                </a:solidFill>
+              </a:defRPr>
+            </a:pPr>
+            <a:r>
+              <a:t>Julian Garzon</a:t>
+            </a:r>
+          </a:p>
+        </p:txBody>
+      </p:sp>
+      <p:sp>
+        <p:nvSpPr>
           <p:cNvPr id="12" name="TextBox 11"/>
           <p:cNvSpPr txBox="1"/>
           <p:nvPr/>
         </p:nvSpPr>
         <p:spPr>
           <a:xfrm>
-            <a:off x="914400" y="4251960"/>
-            <a:ext cx="10332720" cy="457200"/>
+            <a:off x="6675120" y="3200400"/>
+            <a:ext cx="2651760" cy="274320"/>
           </a:xfrm>
           <a:prstGeom prst="rect">
             <a:avLst/>
@@ -10868,14 +11674,84 @@
           <a:lstStyle/>
           <a:p>
             <a:pPr algn="ctr">
-              <a:defRPr sz="1300" b="0">
-                <a:solidFill>
-                  <a:srgbClr val="F59E0B"/>
-                </a:solidFill>
-              </a:defRPr>
-            </a:pPr>
-            <a:r>
-              <a:t>⚠️  Guarda siempre los archivos JSON con codificación UTF-8 para que se muestren los acentos correctamente.</a:t>
+              <a:defRPr sz="1200" b="0">
+                <a:solidFill>
+                  <a:srgbClr val="E5E7EB"/>
+                </a:solidFill>
+              </a:defRPr>
+            </a:pPr>
+            <a:r>
+              <a:t>📧 julian@empresa.com</a:t>
+            </a:r>
+          </a:p>
+        </p:txBody>
+      </p:sp>
+      <p:sp>
+        <p:nvSpPr>
+          <p:cNvPr id="13" name="TextBox 12"/>
+          <p:cNvSpPr txBox="1"/>
+          <p:nvPr/>
+        </p:nvSpPr>
+        <p:spPr>
+          <a:xfrm>
+            <a:off x="6675120" y="3474720"/>
+            <a:ext cx="2651760" cy="274320"/>
+          </a:xfrm>
+          <a:prstGeom prst="rect">
+            <a:avLst/>
+          </a:prstGeom>
+          <a:noFill/>
+        </p:spPr>
+        <p:txBody>
+          <a:bodyPr wrap="square">
+            <a:spAutoFit/>
+          </a:bodyPr>
+          <a:lstStyle/>
+          <a:p>
+            <a:pPr algn="ctr">
+              <a:defRPr sz="1200" b="0">
+                <a:solidFill>
+                  <a:srgbClr val="E5E7EB"/>
+                </a:solidFill>
+              </a:defRPr>
+            </a:pPr>
+            <a:r>
+              <a:t>📱 300 7654321</a:t>
+            </a:r>
+          </a:p>
+        </p:txBody>
+      </p:sp>
+      <p:sp>
+        <p:nvSpPr>
+          <p:cNvPr id="14" name="TextBox 13"/>
+          <p:cNvSpPr txBox="1"/>
+          <p:nvPr/>
+        </p:nvSpPr>
+        <p:spPr>
+          <a:xfrm>
+            <a:off x="6675120" y="3749039"/>
+            <a:ext cx="2651760" cy="274320"/>
+          </a:xfrm>
+          <a:prstGeom prst="rect">
+            <a:avLst/>
+          </a:prstGeom>
+          <a:noFill/>
+        </p:spPr>
+        <p:txBody>
+          <a:bodyPr wrap="square">
+            <a:spAutoFit/>
+          </a:bodyPr>
+          <a:lstStyle/>
+          <a:p>
+            <a:pPr algn="ctr">
+              <a:defRPr sz="1200" b="0">
+                <a:solidFill>
+                  <a:srgbClr val="E5E7EB"/>
+                </a:solidFill>
+              </a:defRPr>
+            </a:pPr>
+            <a:r>
+              <a:t>🏪 C.C Felicidad</a:t>
             </a:r>
           </a:p>
         </p:txBody>
